--- a/slides/pptx/week03.pptx
+++ b/slides/pptx/week03.pptx
@@ -4439,7 +4439,7 @@
                 <a:ea typeface="Calibri" pitchFamily="34" charset="-122"/>
                 <a:cs typeface="Calibri" pitchFamily="34" charset="-120"/>
               </a:rPr>
-              <a:t>Tools find bugs; today we study a bug *class*</a:t>
+              <a:t>Tools find bugs; today we study a bug class</a:t>
             </a:r>
             <a:endParaRPr lang="en-US" sz="1400" dirty="0"/>
           </a:p>
@@ -4767,7 +4767,7 @@
                 <a:ea typeface="Calibri" pitchFamily="34" charset="-122"/>
                 <a:cs typeface="Calibri" pitchFamily="34" charset="-120"/>
               </a:rPr>
-              <a:t>Encryption — reversible *with a key* (confidentiality)</a:t>
+              <a:t>Encryption — reversible with a key (confidentiality)</a:t>
             </a:r>
             <a:endParaRPr lang="en-US" sz="1400" dirty="0"/>
           </a:p>
@@ -4788,7 +4788,7 @@
                 <a:ea typeface="Calibri" pitchFamily="34" charset="-122"/>
                 <a:cs typeface="Calibri" pitchFamily="34" charset="-120"/>
               </a:rPr>
-              <a:t>Encoding — reversible *without a key* (Base64 ≠ security!)</a:t>
+              <a:t>Encoding — reversible without a key (Base64 ≠ security!)</a:t>
             </a:r>
             <a:endParaRPr lang="en-US" sz="1400" dirty="0"/>
           </a:p>

--- a/slides/pptx/week03.pptx
+++ b/slides/pptx/week03.pptx
@@ -19,9 +19,10 @@
     <p:sldId id="267" r:id="rId13"/>
     <p:sldId id="268" r:id="rId14"/>
     <p:sldId id="269" r:id="rId15"/>
+    <p:sldId id="270" r:id="rId16"/>
   </p:sldIdLst>
   <p:notesMasterIdLst>
-    <p:notesMasterId r:id="rId16"/>
+    <p:notesMasterId r:id="rId17"/>
   </p:notesMasterIdLst>
   <p:sldSz cx="9144000" cy="5143500"/>
   <p:notesSz cx="5143500" cy="9144000"/>
@@ -515,7 +516,7 @@
           <a:p>
             <a:r>
               <a:rPr lang="en-US" dirty="0"/>
-              <a:t/>
+              <a:t>Hook: paste an MD5 hash on screen and crack it live in seconds with a wordlist — "this is why how you store passwords matters." Today is about using crypto correctly; most failures are misuse, not broken math. ~2 min.</a:t>
             </a:r>
             <a:endParaRPr lang="en-US" dirty="0"/>
           </a:p>
@@ -603,7 +604,7 @@
           <a:p>
             <a:r>
               <a:rPr lang="en-US" dirty="0"/>
-              <a:t/>
+              <a:t>The "right answers" slide — students should leave able to pick the correct primitive. Emphasize: use vetted libraries, don't invent. ~3 min.</a:t>
             </a:r>
             <a:endParaRPr lang="en-US" dirty="0"/>
           </a:p>
@@ -691,7 +692,7 @@
           <a:p>
             <a:r>
               <a:rPr lang="en-US" dirty="0"/>
-              <a:t/>
+              <a:t>Quick reference; they map lab findings to these. ~1 min.</a:t>
             </a:r>
             <a:endParaRPr lang="en-US" dirty="0"/>
           </a:p>
@@ -779,7 +780,7 @@
           <a:p>
             <a:r>
               <a:rPr lang="en-US" dirty="0"/>
-              <a:t/>
+              <a:t>Explain rounds before lab. Round 1 = instant-feedback fun; round 3 = the real learning (fix it). Leaderboard on round 1. ~3 min.</a:t>
             </a:r>
             <a:endParaRPr lang="en-US" dirty="0"/>
           </a:p>
@@ -867,7 +868,7 @@
           <a:p>
             <a:r>
               <a:rPr lang="en-US" dirty="0"/>
-              <a:t/>
+              <a:t>Graded output. Also: crack NoteVault's MD5 hashes for the project (worksheet). Point to vulnerable_crypto.py + solution_skeleton.py.</a:t>
             </a:r>
             <a:endParaRPr lang="en-US" dirty="0"/>
           </a:p>
@@ -955,7 +956,7 @@
           <a:p>
             <a:r>
               <a:rPr lang="en-US" dirty="0"/>
-              <a:t/>
+              <a:t>Recap. Cold-call: "how should we store passwords, and why salted+slow?" ~2 min.</a:t>
             </a:r>
             <a:endParaRPr lang="en-US" dirty="0"/>
           </a:p>
@@ -979,6 +980,94 @@
             <a:fld id="{F7021451-1387-4CA6-816F-3879F97B5CBC}" type="slidenum">
               <a:rPr lang="en-US"/>
               <a:t>14</a:t>
+            </a:fld>
+            <a:endParaRPr lang="en-US"/>
+          </a:p>
+        </p:txBody>
+      </p:sp>
+    </p:spTree>
+    <p:extLst>
+      <p:ext uri="{BB962C8B-B14F-4D97-AF65-F5344CB8AC3E}">
+        <p14:creationId xmlns:p14="http://schemas.microsoft.com/office/powerpoint/2010/main" val="1024086991"/>
+      </p:ext>
+    </p:extLst>
+  </p:cSld>
+  <p:clrMapOvr>
+    <a:masterClrMapping/>
+  </p:clrMapOvr>
+</p:notes>
+</file>
+
+<file path=ppt/notesSlides/notesSlide15.xml><?xml version="1.0" encoding="utf-8"?>
+<p:notes xmlns:a="http://schemas.openxmlformats.org/drawingml/2006/main" xmlns:r="http://schemas.openxmlformats.org/officeDocument/2006/relationships" xmlns:p="http://schemas.openxmlformats.org/presentationml/2006/main">
+  <p:cSld>
+    <p:spTree>
+      <p:nvGrpSpPr>
+        <p:cNvPr id="1" name=""/>
+        <p:cNvGrpSpPr/>
+        <p:nvPr/>
+      </p:nvGrpSpPr>
+      <p:grpSpPr>
+        <a:xfrm>
+          <a:off x="0" y="0"/>
+          <a:ext cx="0" cy="0"/>
+          <a:chOff x="0" y="0"/>
+          <a:chExt cx="0" cy="0"/>
+        </a:xfrm>
+      </p:grpSpPr>
+      <p:sp>
+        <p:nvSpPr>
+          <p:cNvPr id="2" name="Slide Image Placeholder 1"/>
+          <p:cNvSpPr>
+            <a:spLocks noGrp="1" noRot="1" noChangeAspect="1"/>
+          </p:cNvSpPr>
+          <p:nvPr>
+            <p:ph type="sldImg"/>
+          </p:nvPr>
+        </p:nvSpPr>
+        <p:spPr/>
+      </p:sp>
+      <p:sp>
+        <p:nvSpPr>
+          <p:cNvPr id="3" name="Notes Placeholder 2"/>
+          <p:cNvSpPr>
+            <a:spLocks noGrp="1"/>
+          </p:cNvSpPr>
+          <p:nvPr>
+            <p:ph type="body" idx="1"/>
+          </p:nvPr>
+        </p:nvSpPr>
+        <p:spPr/>
+        <p:txBody>
+          <a:bodyPr/>
+          <a:lstStyle/>
+          <a:p>
+            <a:r>
+              <a:rPr lang="en-US" dirty="0"/>
+              <a:t>Cliffhanger: "Next week — type one quote mark and log in as admin." Remind: hashcat + wordlist ready.</a:t>
+            </a:r>
+            <a:endParaRPr lang="en-US" dirty="0"/>
+          </a:p>
+        </p:txBody>
+      </p:sp>
+      <p:sp>
+        <p:nvSpPr>
+          <p:cNvPr id="4" name="Slide Number Placeholder 3"/>
+          <p:cNvSpPr>
+            <a:spLocks noGrp="1"/>
+          </p:cNvSpPr>
+          <p:nvPr>
+            <p:ph type="sldNum" sz="quarter" idx="10"/>
+          </p:nvPr>
+        </p:nvSpPr>
+        <p:spPr/>
+        <p:txBody>
+          <a:bodyPr/>
+          <a:lstStyle/>
+          <a:p>
+            <a:fld id="{F7021451-1387-4CA6-816F-3879F97B5CBC}" type="slidenum">
+              <a:rPr lang="en-US"/>
+              <a:t>15</a:t>
             </a:fld>
             <a:endParaRPr lang="en-US"/>
           </a:p>
@@ -1043,7 +1132,7 @@
           <a:p>
             <a:r>
               <a:rPr lang="en-US" dirty="0"/>
-              <a:t/>
+              <a:t>Roadmap, 1 min. Lab: crack weak hashes + break an ECB oracle, then remediate. Theme: "don't roll your own crypto; misuse vetted primitives correctly."</a:t>
             </a:r>
             <a:endParaRPr lang="en-US" dirty="0"/>
           </a:p>
@@ -1131,7 +1220,7 @@
           <a:p>
             <a:r>
               <a:rPr lang="en-US" dirty="0"/>
-              <a:t/>
+              <a:t>Bridge: a SAST tool flags MD5 (W2) — today we understand WHY it's wrong and what to do instead. ~1 min.</a:t>
             </a:r>
             <a:endParaRPr lang="en-US" dirty="0"/>
           </a:p>
@@ -1219,7 +1308,7 @@
           <a:p>
             <a:r>
               <a:rPr lang="en-US" dirty="0"/>
-              <a:t/>
+              <a:t>The #1 source of crypto bugs is conceptual confusion. Demo: base64-decode a string live to show encoding gives no protection. Ask: "is hashing reversible?" (no) "is Base64?" (yes, trivially). ~5 min.</a:t>
             </a:r>
             <a:endParaRPr lang="en-US" dirty="0"/>
           </a:p>
@@ -1307,7 +1396,7 @@
           <a:p>
             <a:r>
               <a:rPr lang="en-US" dirty="0"/>
-              <a:t/>
+              <a:t>Keep it intuitive: symmetric = one shared password (fast, but key distribution problem); asymmetric = padlock anyone can close, only you open. TLS = best of both. ~4 min.</a:t>
             </a:r>
             <a:endParaRPr lang="en-US" dirty="0"/>
           </a:p>
@@ -1395,7 +1484,7 @@
           <a:p>
             <a:r>
               <a:rPr lang="en-US" dirty="0"/>
-              <a:t/>
+              <a:t>The single most common real-world crypto failure. Why slow + salted: slow defeats brute force, salt defeats rainbow tables and makes identical passwords hash differently. Tie to the hook (cracked MD5). ~6 min.</a:t>
             </a:r>
             <a:endParaRPr lang="en-US" dirty="0"/>
           </a:p>
@@ -1483,7 +1572,7 @@
           <a:p>
             <a:r>
               <a:rPr lang="en-US" dirty="0"/>
-              <a:t/>
+              <a:t>The visual that makes ECB "click". Walk the block mapping: identical plaintext → identical ciphertext, so structure leaks. Show the ECB-penguin image if you have it. This is exactly the ECB oracle they break in the lab. ~6 min.</a:t>
             </a:r>
             <a:endParaRPr lang="en-US" dirty="0"/>
           </a:p>
@@ -1571,7 +1660,7 @@
           <a:p>
             <a:r>
               <a:rPr lang="en-US" dirty="0"/>
-              <a:t/>
+              <a:t>Walk the attack: the attacker doesn't "reverse" the hash — they hash guesses and compare. Fast+unsalted = cheap; salted+slow = expensive. This is the lab's round 1. ~5 min.</a:t>
             </a:r>
             <a:endParaRPr lang="en-US" dirty="0"/>
           </a:p>
@@ -1659,7 +1748,7 @@
           <a:p>
             <a:r>
               <a:rPr lang="en-US" dirty="0"/>
-              <a:t/>
+              <a:t>The checklist of what to look for / avoid. Each maps to a CWE they'll cite. Note: "no integrity" = attacker can flip ciphertext bits undetected → that's why AEAD (GCM) matters. ~4 min.</a:t>
             </a:r>
             <a:endParaRPr lang="en-US" dirty="0"/>
           </a:p>
@@ -2321,7 +2410,7 @@
                 <a:ea typeface="Arial" pitchFamily="34" charset="-122"/>
                 <a:cs typeface="Arial" pitchFamily="34" charset="-120"/>
               </a:rPr>
-              <a:t>CWE mapping</a:t>
+              <a:t>Do this instead</a:t>
             </a:r>
             <a:endParaRPr lang="en-US" sz="2600" dirty="0"/>
           </a:p>
@@ -2393,7 +2482,7 @@
                 <a:ea typeface="Calibri" pitchFamily="34" charset="-122"/>
                 <a:cs typeface="Calibri" pitchFamily="34" charset="-120"/>
               </a:rPr>
-              <a:t>CWE-327 — broken/risky crypto algorithm</a:t>
+              <a:t>Authenticated encryption: AES-GCM or ChaCha20-Poly1305</a:t>
             </a:r>
             <a:endParaRPr lang="en-US" sz="1400" dirty="0"/>
           </a:p>
@@ -2414,7 +2503,7 @@
                 <a:ea typeface="Calibri" pitchFamily="34" charset="-122"/>
                 <a:cs typeface="Calibri" pitchFamily="34" charset="-120"/>
               </a:rPr>
-              <a:t>CWE-916 — weak password hash (no/weak KDF)</a:t>
+              <a:t>Keys from a secrets manager / KMS — never in code</a:t>
             </a:r>
             <a:endParaRPr lang="en-US" sz="1400" dirty="0"/>
           </a:p>
@@ -2435,7 +2524,7 @@
                 <a:ea typeface="Calibri" pitchFamily="34" charset="-122"/>
                 <a:cs typeface="Calibri" pitchFamily="34" charset="-120"/>
               </a:rPr>
-              <a:t>CWE-330 — insufficiently random values</a:t>
+              <a:t>CSPRNG: secrets (Python), crypto.randomBytes (Node)</a:t>
             </a:r>
             <a:endParaRPr lang="en-US" sz="1400" dirty="0"/>
           </a:p>
@@ -2456,7 +2545,7 @@
                 <a:ea typeface="Calibri" pitchFamily="34" charset="-122"/>
                 <a:cs typeface="Calibri" pitchFamily="34" charset="-120"/>
               </a:rPr>
-              <a:t>CWE-321 — hardcoded key</a:t>
+              <a:t>SHA-256+ for integrity; argon2id/bcrypt for passwords</a:t>
             </a:r>
             <a:endParaRPr lang="en-US" sz="1400" dirty="0"/>
           </a:p>
@@ -2670,7 +2759,7 @@
                 <a:ea typeface="Arial" pitchFamily="34" charset="-122"/>
                 <a:cs typeface="Arial" pitchFamily="34" charset="-120"/>
               </a:rPr>
-              <a:t>🔓 Game — Capture the Hash</a:t>
+              <a:t>CWE mapping</a:t>
             </a:r>
             <a:endParaRPr lang="en-US" sz="2600" dirty="0"/>
           </a:p>
@@ -2685,11 +2774,11 @@
         <p:spPr>
           <a:xfrm>
             <a:off x="457200" y="1325880"/>
-            <a:ext cx="8229600" cy="1207008"/>
+            <a:ext cx="8229600" cy="1517904"/>
           </a:xfrm>
           <a:prstGeom prst="roundRect">
             <a:avLst>
-              <a:gd name="adj" fmla="val 6061"/>
+              <a:gd name="adj" fmla="val 4819"/>
             </a:avLst>
           </a:prstGeom>
           <a:solidFill>
@@ -2714,7 +2803,7 @@
         <p:spPr>
           <a:xfrm>
             <a:off x="731520" y="1435608"/>
-            <a:ext cx="7680960" cy="987552"/>
+            <a:ext cx="7680960" cy="1298448"/>
           </a:xfrm>
           <a:prstGeom prst="rect">
             <a:avLst/>
@@ -2742,7 +2831,7 @@
                 <a:ea typeface="Calibri" pitchFamily="34" charset="-122"/>
                 <a:cs typeface="Calibri" pitchFamily="34" charset="-120"/>
               </a:rPr>
-              <a:t>Round 1 (speedrun): crack unsalted/MD5 hashes (hashcat/john + wordlist); fastest team wins</a:t>
+              <a:t>CWE-327 — broken/risky crypto algorithm</a:t>
             </a:r>
             <a:endParaRPr lang="en-US" sz="1400" dirty="0"/>
           </a:p>
@@ -2763,7 +2852,7 @@
                 <a:ea typeface="Calibri" pitchFamily="34" charset="-122"/>
                 <a:cs typeface="Calibri" pitchFamily="34" charset="-120"/>
               </a:rPr>
-              <a:t>Round 2: exploit an ECB oracle (identical blocks)</a:t>
+              <a:t>CWE-916 — weak password hash (no/weak KDF)</a:t>
             </a:r>
             <a:endParaRPr lang="en-US" sz="1400" dirty="0"/>
           </a:p>
@@ -2784,7 +2873,28 @@
                 <a:ea typeface="Calibri" pitchFamily="34" charset="-122"/>
                 <a:cs typeface="Calibri" pitchFamily="34" charset="-120"/>
               </a:rPr>
-              <a:t>Round 3 (defend): argon2id + AES-GCM + keys from env</a:t>
+              <a:t>CWE-330 — insufficiently random values</a:t>
+            </a:r>
+            <a:endParaRPr lang="en-US" sz="1400" dirty="0"/>
+          </a:p>
+          <a:p>
+            <a:pPr marL="342900" indent="-342900">
+              <a:spcAft>
+                <a:spcPts val="600"/>
+              </a:spcAft>
+              <a:buSzPct val="100000"/>
+              <a:buChar char="•"/>
+            </a:pPr>
+            <a:r>
+              <a:rPr lang="en-US" sz="1400" dirty="0">
+                <a:solidFill>
+                  <a:srgbClr val="E6EDF3"/>
+                </a:solidFill>
+                <a:latin typeface="Calibri" pitchFamily="34" charset="0"/>
+                <a:ea typeface="Calibri" pitchFamily="34" charset="-122"/>
+                <a:cs typeface="Calibri" pitchFamily="34" charset="-120"/>
+              </a:rPr>
+              <a:t>CWE-321 — hardcoded key</a:t>
             </a:r>
             <a:endParaRPr lang="en-US" sz="1400" dirty="0"/>
           </a:p>
@@ -2998,7 +3108,7 @@
                 <a:ea typeface="Arial" pitchFamily="34" charset="-122"/>
                 <a:cs typeface="Arial" pitchFamily="34" charset="-120"/>
               </a:rPr>
-              <a:t>Lab 3 — deliverable</a:t>
+              <a:t>🔓 Game — Capture the Hash</a:t>
             </a:r>
             <a:endParaRPr lang="en-US" sz="2600" dirty="0"/>
           </a:p>
@@ -3012,349 +3122,16 @@
         </p:nvSpPr>
         <p:spPr>
           <a:xfrm>
-            <a:off x="502920" y="1325880"/>
-            <a:ext cx="384048" cy="384048"/>
-          </a:xfrm>
-          <a:prstGeom prst="ellipse">
-            <a:avLst/>
-          </a:prstGeom>
-          <a:solidFill>
-            <a:srgbClr val="E35205"/>
-          </a:solidFill>
-          <a:ln/>
-        </p:spPr>
-      </p:sp>
-      <p:sp>
-        <p:nvSpPr>
-          <p:cNvPr id="6" name="Text 3"/>
-          <p:cNvSpPr/>
-          <p:nvPr/>
-        </p:nvSpPr>
-        <p:spPr>
-          <a:xfrm>
-            <a:off x="502920" y="1325880"/>
-            <a:ext cx="384048" cy="384048"/>
-          </a:xfrm>
-          <a:prstGeom prst="rect">
-            <a:avLst/>
-          </a:prstGeom>
-          <a:noFill/>
-          <a:ln/>
-        </p:spPr>
-        <p:txBody>
-          <a:bodyPr wrap="square" lIns="0" tIns="0" rIns="0" bIns="0" rtlCol="0" anchor="ctr"/>
-          <a:lstStyle/>
-          <a:p>
-            <a:pPr algn="ctr" indent="0" marL="0">
-              <a:buNone/>
-            </a:pPr>
-            <a:r>
-              <a:rPr lang="en-US" sz="1500" b="1" dirty="0">
-                <a:solidFill>
-                  <a:srgbClr val="0E1726"/>
-                </a:solidFill>
-                <a:latin typeface="Arial" pitchFamily="34" charset="0"/>
-                <a:ea typeface="Arial" pitchFamily="34" charset="-122"/>
-                <a:cs typeface="Arial" pitchFamily="34" charset="-120"/>
-              </a:rPr>
-              <a:t>1</a:t>
-            </a:r>
-            <a:endParaRPr lang="en-US" sz="1500" dirty="0"/>
-          </a:p>
-        </p:txBody>
-      </p:sp>
-      <p:sp>
-        <p:nvSpPr>
-          <p:cNvPr id="7" name="Text 4"/>
-          <p:cNvSpPr/>
-          <p:nvPr/>
-        </p:nvSpPr>
-        <p:spPr>
-          <a:xfrm>
-            <a:off x="1051560" y="1325880"/>
-            <a:ext cx="7589520" cy="384048"/>
-          </a:xfrm>
-          <a:prstGeom prst="rect">
-            <a:avLst/>
-          </a:prstGeom>
-          <a:noFill/>
-          <a:ln/>
-        </p:spPr>
-        <p:txBody>
-          <a:bodyPr wrap="square" lIns="0" tIns="0" rIns="0" bIns="0" rtlCol="0" anchor="ctr"/>
-          <a:lstStyle/>
-          <a:p>
-            <a:pPr indent="0" marL="0">
-              <a:buNone/>
-            </a:pPr>
-            <a:r>
-              <a:rPr lang="en-US" sz="1350" dirty="0">
-                <a:solidFill>
-                  <a:srgbClr val="E6EDF3"/>
-                </a:solidFill>
-                <a:latin typeface="Calibri" pitchFamily="34" charset="0"/>
-                <a:ea typeface="Calibri" pitchFamily="34" charset="-122"/>
-                <a:cs typeface="Calibri" pitchFamily="34" charset="-120"/>
-              </a:rPr>
-              <a:t>Cracked hashes + method</a:t>
-            </a:r>
-            <a:endParaRPr lang="en-US" sz="1350" dirty="0"/>
-          </a:p>
-        </p:txBody>
-      </p:sp>
-      <p:sp>
-        <p:nvSpPr>
-          <p:cNvPr id="8" name="Shape 5"/>
-          <p:cNvSpPr/>
-          <p:nvPr/>
-        </p:nvSpPr>
-        <p:spPr>
-          <a:xfrm>
-            <a:off x="502920" y="1783080"/>
-            <a:ext cx="384048" cy="384048"/>
-          </a:xfrm>
-          <a:prstGeom prst="ellipse">
-            <a:avLst/>
-          </a:prstGeom>
-          <a:solidFill>
-            <a:srgbClr val="E35205"/>
-          </a:solidFill>
-          <a:ln/>
-        </p:spPr>
-      </p:sp>
-      <p:sp>
-        <p:nvSpPr>
-          <p:cNvPr id="9" name="Text 6"/>
-          <p:cNvSpPr/>
-          <p:nvPr/>
-        </p:nvSpPr>
-        <p:spPr>
-          <a:xfrm>
-            <a:off x="502920" y="1783080"/>
-            <a:ext cx="384048" cy="384048"/>
-          </a:xfrm>
-          <a:prstGeom prst="rect">
-            <a:avLst/>
-          </a:prstGeom>
-          <a:noFill/>
-          <a:ln/>
-        </p:spPr>
-        <p:txBody>
-          <a:bodyPr wrap="square" lIns="0" tIns="0" rIns="0" bIns="0" rtlCol="0" anchor="ctr"/>
-          <a:lstStyle/>
-          <a:p>
-            <a:pPr algn="ctr" indent="0" marL="0">
-              <a:buNone/>
-            </a:pPr>
-            <a:r>
-              <a:rPr lang="en-US" sz="1500" b="1" dirty="0">
-                <a:solidFill>
-                  <a:srgbClr val="0E1726"/>
-                </a:solidFill>
-                <a:latin typeface="Arial" pitchFamily="34" charset="0"/>
-                <a:ea typeface="Arial" pitchFamily="34" charset="-122"/>
-                <a:cs typeface="Arial" pitchFamily="34" charset="-120"/>
-              </a:rPr>
-              <a:t>2</a:t>
-            </a:r>
-            <a:endParaRPr lang="en-US" sz="1500" dirty="0"/>
-          </a:p>
-        </p:txBody>
-      </p:sp>
-      <p:sp>
-        <p:nvSpPr>
-          <p:cNvPr id="10" name="Text 7"/>
-          <p:cNvSpPr/>
-          <p:nvPr/>
-        </p:nvSpPr>
-        <p:spPr>
-          <a:xfrm>
-            <a:off x="1051560" y="1783080"/>
-            <a:ext cx="7589520" cy="384048"/>
-          </a:xfrm>
-          <a:prstGeom prst="rect">
-            <a:avLst/>
-          </a:prstGeom>
-          <a:noFill/>
-          <a:ln/>
-        </p:spPr>
-        <p:txBody>
-          <a:bodyPr wrap="square" lIns="0" tIns="0" rIns="0" bIns="0" rtlCol="0" anchor="ctr"/>
-          <a:lstStyle/>
-          <a:p>
-            <a:pPr indent="0" marL="0">
-              <a:buNone/>
-            </a:pPr>
-            <a:r>
-              <a:rPr lang="en-US" sz="1350" dirty="0">
-                <a:solidFill>
-                  <a:srgbClr val="E6EDF3"/>
-                </a:solidFill>
-                <a:latin typeface="Calibri" pitchFamily="34" charset="0"/>
-                <a:ea typeface="Calibri" pitchFamily="34" charset="-122"/>
-                <a:cs typeface="Calibri" pitchFamily="34" charset="-120"/>
-              </a:rPr>
-              <a:t>ECB oracle exploitation notes</a:t>
-            </a:r>
-            <a:endParaRPr lang="en-US" sz="1350" dirty="0"/>
-          </a:p>
-        </p:txBody>
-      </p:sp>
-      <p:sp>
-        <p:nvSpPr>
-          <p:cNvPr id="11" name="Shape 8"/>
-          <p:cNvSpPr/>
-          <p:nvPr/>
-        </p:nvSpPr>
-        <p:spPr>
-          <a:xfrm>
-            <a:off x="502920" y="2240280"/>
-            <a:ext cx="384048" cy="384048"/>
-          </a:xfrm>
-          <a:prstGeom prst="ellipse">
-            <a:avLst/>
-          </a:prstGeom>
-          <a:solidFill>
-            <a:srgbClr val="E35205"/>
-          </a:solidFill>
-          <a:ln/>
-        </p:spPr>
-      </p:sp>
-      <p:sp>
-        <p:nvSpPr>
-          <p:cNvPr id="12" name="Text 9"/>
-          <p:cNvSpPr/>
-          <p:nvPr/>
-        </p:nvSpPr>
-        <p:spPr>
-          <a:xfrm>
-            <a:off x="502920" y="2240280"/>
-            <a:ext cx="384048" cy="384048"/>
-          </a:xfrm>
-          <a:prstGeom prst="rect">
-            <a:avLst/>
-          </a:prstGeom>
-          <a:noFill/>
-          <a:ln/>
-        </p:spPr>
-        <p:txBody>
-          <a:bodyPr wrap="square" lIns="0" tIns="0" rIns="0" bIns="0" rtlCol="0" anchor="ctr"/>
-          <a:lstStyle/>
-          <a:p>
-            <a:pPr algn="ctr" indent="0" marL="0">
-              <a:buNone/>
-            </a:pPr>
-            <a:r>
-              <a:rPr lang="en-US" sz="1500" b="1" dirty="0">
-                <a:solidFill>
-                  <a:srgbClr val="0E1726"/>
-                </a:solidFill>
-                <a:latin typeface="Arial" pitchFamily="34" charset="0"/>
-                <a:ea typeface="Arial" pitchFamily="34" charset="-122"/>
-                <a:cs typeface="Arial" pitchFamily="34" charset="-120"/>
-              </a:rPr>
-              <a:t>3</a:t>
-            </a:r>
-            <a:endParaRPr lang="en-US" sz="1500" dirty="0"/>
-          </a:p>
-        </p:txBody>
-      </p:sp>
-      <p:sp>
-        <p:nvSpPr>
-          <p:cNvPr id="13" name="Text 10"/>
-          <p:cNvSpPr/>
-          <p:nvPr/>
-        </p:nvSpPr>
-        <p:spPr>
-          <a:xfrm>
-            <a:off x="1051560" y="2240280"/>
-            <a:ext cx="7589520" cy="384048"/>
-          </a:xfrm>
-          <a:prstGeom prst="rect">
-            <a:avLst/>
-          </a:prstGeom>
-          <a:noFill/>
-          <a:ln/>
-        </p:spPr>
-        <p:txBody>
-          <a:bodyPr wrap="square" lIns="0" tIns="0" rIns="0" bIns="0" rtlCol="0" anchor="ctr"/>
-          <a:lstStyle/>
-          <a:p>
-            <a:pPr indent="0" marL="0">
-              <a:buNone/>
-            </a:pPr>
-            <a:r>
-              <a:rPr lang="en-US" sz="1350" dirty="0">
-                <a:solidFill>
-                  <a:srgbClr val="E6EDF3"/>
-                </a:solidFill>
-                <a:latin typeface="Calibri" pitchFamily="34" charset="0"/>
-                <a:ea typeface="Calibri" pitchFamily="34" charset="-122"/>
-                <a:cs typeface="Calibri" pitchFamily="34" charset="-120"/>
-              </a:rPr>
-              <a:t>Before/after code + which CWE each fix closes</a:t>
-            </a:r>
-            <a:endParaRPr lang="en-US" sz="1350" dirty="0"/>
-          </a:p>
-        </p:txBody>
-      </p:sp>
-      <p:sp>
-        <p:nvSpPr>
-          <p:cNvPr id="14" name="Text 11"/>
-          <p:cNvSpPr/>
-          <p:nvPr/>
-        </p:nvSpPr>
-        <p:spPr>
-          <a:xfrm>
-            <a:off x="457200" y="4800600"/>
-            <a:ext cx="6949440" cy="274320"/>
-          </a:xfrm>
-          <a:prstGeom prst="rect">
-            <a:avLst/>
-          </a:prstGeom>
-          <a:noFill/>
-          <a:ln/>
-        </p:spPr>
-        <p:txBody>
-          <a:bodyPr wrap="square" lIns="0" tIns="0" rIns="0" bIns="0" rtlCol="0" anchor="ctr"/>
-          <a:lstStyle/>
-          <a:p>
-            <a:pPr indent="0" marL="0">
-              <a:buNone/>
-            </a:pPr>
-            <a:r>
-              <a:rPr lang="en-US" sz="900" dirty="0">
-                <a:solidFill>
-                  <a:srgbClr val="94A3B8"/>
-                </a:solidFill>
-                <a:latin typeface="Calibri" pitchFamily="34" charset="0"/>
-                <a:ea typeface="Calibri" pitchFamily="34" charset="-122"/>
-                <a:cs typeface="Calibri" pitchFamily="34" charset="-120"/>
-              </a:rPr>
-              <a:t>Software Security · Week 3</a:t>
-            </a:r>
-            <a:endParaRPr lang="en-US" sz="900" dirty="0"/>
-          </a:p>
-        </p:txBody>
-      </p:sp>
-      <p:sp>
-        <p:nvSpPr>
-          <p:cNvPr id="15" name="Shape 12"/>
-          <p:cNvSpPr/>
-          <p:nvPr/>
-        </p:nvSpPr>
-        <p:spPr>
-          <a:xfrm>
-            <a:off x="7772400" y="4590288"/>
-            <a:ext cx="969264" cy="475488"/>
+            <a:off x="457200" y="1325880"/>
+            <a:ext cx="8229600" cy="1207008"/>
           </a:xfrm>
           <a:prstGeom prst="roundRect">
             <a:avLst>
-              <a:gd name="adj" fmla="val 11538"/>
+              <a:gd name="adj" fmla="val 6061"/>
             </a:avLst>
           </a:prstGeom>
           <a:solidFill>
-            <a:srgbClr val="FFFFFF"/>
+            <a:srgbClr val="18243A"/>
           </a:solidFill>
           <a:ln/>
           <a:effectLst>
@@ -3366,9 +3143,162 @@
           </a:effectLst>
         </p:spPr>
       </p:sp>
+      <p:sp>
+        <p:nvSpPr>
+          <p:cNvPr id="6" name="Text 3"/>
+          <p:cNvSpPr/>
+          <p:nvPr/>
+        </p:nvSpPr>
+        <p:spPr>
+          <a:xfrm>
+            <a:off x="731520" y="1435608"/>
+            <a:ext cx="7680960" cy="987552"/>
+          </a:xfrm>
+          <a:prstGeom prst="rect">
+            <a:avLst/>
+          </a:prstGeom>
+          <a:noFill/>
+          <a:ln/>
+        </p:spPr>
+        <p:txBody>
+          <a:bodyPr wrap="square" lIns="0" tIns="0" rIns="0" bIns="0" rtlCol="0" anchor="t"/>
+          <a:lstStyle/>
+          <a:p>
+            <a:pPr marL="342900" indent="-342900">
+              <a:spcAft>
+                <a:spcPts val="600"/>
+              </a:spcAft>
+              <a:buSzPct val="100000"/>
+              <a:buChar char="•"/>
+            </a:pPr>
+            <a:r>
+              <a:rPr lang="en-US" sz="1400" dirty="0">
+                <a:solidFill>
+                  <a:srgbClr val="E6EDF3"/>
+                </a:solidFill>
+                <a:latin typeface="Calibri" pitchFamily="34" charset="0"/>
+                <a:ea typeface="Calibri" pitchFamily="34" charset="-122"/>
+                <a:cs typeface="Calibri" pitchFamily="34" charset="-120"/>
+              </a:rPr>
+              <a:t>Round 1 (speedrun): crack unsalted/MD5 hashes — fastest team wins</a:t>
+            </a:r>
+            <a:endParaRPr lang="en-US" sz="1400" dirty="0"/>
+          </a:p>
+          <a:p>
+            <a:pPr marL="342900" indent="-342900">
+              <a:spcAft>
+                <a:spcPts val="600"/>
+              </a:spcAft>
+              <a:buSzPct val="100000"/>
+              <a:buChar char="•"/>
+            </a:pPr>
+            <a:r>
+              <a:rPr lang="en-US" sz="1400" dirty="0">
+                <a:solidFill>
+                  <a:srgbClr val="E6EDF3"/>
+                </a:solidFill>
+                <a:latin typeface="Calibri" pitchFamily="34" charset="0"/>
+                <a:ea typeface="Calibri" pitchFamily="34" charset="-122"/>
+                <a:cs typeface="Calibri" pitchFamily="34" charset="-120"/>
+              </a:rPr>
+              <a:t>Round 2: exploit an ECB oracle (identical blocks)</a:t>
+            </a:r>
+            <a:endParaRPr lang="en-US" sz="1400" dirty="0"/>
+          </a:p>
+          <a:p>
+            <a:pPr marL="342900" indent="-342900">
+              <a:spcAft>
+                <a:spcPts val="600"/>
+              </a:spcAft>
+              <a:buSzPct val="100000"/>
+              <a:buChar char="•"/>
+            </a:pPr>
+            <a:r>
+              <a:rPr lang="en-US" sz="1400" dirty="0">
+                <a:solidFill>
+                  <a:srgbClr val="E6EDF3"/>
+                </a:solidFill>
+                <a:latin typeface="Calibri" pitchFamily="34" charset="0"/>
+                <a:ea typeface="Calibri" pitchFamily="34" charset="-122"/>
+                <a:cs typeface="Calibri" pitchFamily="34" charset="-120"/>
+              </a:rPr>
+              <a:t>Round 3 (defend): argon2id + AES-GCM + keys from env</a:t>
+            </a:r>
+            <a:endParaRPr lang="en-US" sz="1400" dirty="0"/>
+          </a:p>
+        </p:txBody>
+      </p:sp>
+      <p:sp>
+        <p:nvSpPr>
+          <p:cNvPr id="7" name="Text 4"/>
+          <p:cNvSpPr/>
+          <p:nvPr/>
+        </p:nvSpPr>
+        <p:spPr>
+          <a:xfrm>
+            <a:off x="457200" y="4800600"/>
+            <a:ext cx="6949440" cy="274320"/>
+          </a:xfrm>
+          <a:prstGeom prst="rect">
+            <a:avLst/>
+          </a:prstGeom>
+          <a:noFill/>
+          <a:ln/>
+        </p:spPr>
+        <p:txBody>
+          <a:bodyPr wrap="square" lIns="0" tIns="0" rIns="0" bIns="0" rtlCol="0" anchor="ctr"/>
+          <a:lstStyle/>
+          <a:p>
+            <a:pPr indent="0" marL="0">
+              <a:buNone/>
+            </a:pPr>
+            <a:r>
+              <a:rPr lang="en-US" sz="900" dirty="0">
+                <a:solidFill>
+                  <a:srgbClr val="94A3B8"/>
+                </a:solidFill>
+                <a:latin typeface="Calibri" pitchFamily="34" charset="0"/>
+                <a:ea typeface="Calibri" pitchFamily="34" charset="-122"/>
+                <a:cs typeface="Calibri" pitchFamily="34" charset="-120"/>
+              </a:rPr>
+              <a:t>Software Security · Week 3</a:t>
+            </a:r>
+            <a:endParaRPr lang="en-US" sz="900" dirty="0"/>
+          </a:p>
+        </p:txBody>
+      </p:sp>
+      <p:sp>
+        <p:nvSpPr>
+          <p:cNvPr id="8" name="Shape 5"/>
+          <p:cNvSpPr/>
+          <p:nvPr/>
+        </p:nvSpPr>
+        <p:spPr>
+          <a:xfrm>
+            <a:off x="7772400" y="4590288"/>
+            <a:ext cx="969264" cy="475488"/>
+          </a:xfrm>
+          <a:prstGeom prst="roundRect">
+            <a:avLst>
+              <a:gd name="adj" fmla="val 11538"/>
+            </a:avLst>
+          </a:prstGeom>
+          <a:solidFill>
+            <a:srgbClr val="FFFFFF"/>
+          </a:solidFill>
+          <a:ln/>
+          <a:effectLst>
+            <a:outerShdw sx="100000" sy="100000" kx="0" ky="0" algn="bl" rotWithShape="0" blurRad="101600" dist="38100" dir="5400000">
+              <a:srgbClr val="000000">
+                <a:alpha val="35000"/>
+              </a:srgbClr>
+            </a:outerShdw>
+          </a:effectLst>
+        </p:spPr>
+      </p:sp>
       <p:pic>
         <p:nvPicPr>
-          <p:cNvPr id="16" name="Image 1" descr="/Users/pop7/Library/CloudStorage/OneDrive-MonsterConnectCo.,Ltd/Lecture/KOSEN69 - software-security/slides/pptx/assets/logo-small.png">    </p:cNvPr>
+          <p:cNvPr id="9" name="Image 1" descr="/Users/pop7/Library/CloudStorage/OneDrive-MonsterConnectCo.,Ltd/Lecture/KOSEN69 - software-security/slides/pptx/assets/logo-small.png">    </p:cNvPr>
           <p:cNvPicPr>
             <a:picLocks noChangeAspect="1"/>
           </p:cNvPicPr>
@@ -3506,7 +3436,7 @@
                 <a:ea typeface="Arial" pitchFamily="34" charset="-122"/>
                 <a:cs typeface="Arial" pitchFamily="34" charset="-120"/>
               </a:rPr>
-              <a:t>Key takeaways</a:t>
+              <a:t>Lab 3 — deliverable</a:t>
             </a:r>
             <a:endParaRPr lang="en-US" sz="2600" dirty="0"/>
           </a:p>
@@ -3578,7 +3508,7 @@
                 <a:ea typeface="Calibri" pitchFamily="34" charset="-122"/>
                 <a:cs typeface="Calibri" pitchFamily="34" charset="-120"/>
               </a:rPr>
-              <a:t>Encoding is not encryption; hashing is not reversible</a:t>
+              <a:t>Cracked hashes + method · ECB-leak proof · predictable-token note</a:t>
             </a:r>
             <a:endParaRPr lang="en-US" sz="1400" dirty="0"/>
           </a:p>
@@ -3599,7 +3529,7 @@
                 <a:ea typeface="Calibri" pitchFamily="34" charset="-122"/>
                 <a:cs typeface="Calibri" pitchFamily="34" charset="-120"/>
               </a:rPr>
-              <a:t>Use vetted KDFs + authenticated encryption — never roll your own</a:t>
+              <a:t>Before/after code (misuse → fix → CWE closed)</a:t>
             </a:r>
             <a:endParaRPr lang="en-US" sz="1400" dirty="0"/>
           </a:p>
@@ -3620,7 +3550,7 @@
                 <a:ea typeface="Calibri" pitchFamily="34" charset="-122"/>
                 <a:cs typeface="Calibri" pitchFamily="34" charset="-120"/>
               </a:rPr>
-              <a:t>Randomness and key handling matter as much as the algorithm</a:t>
+              <a:t>+ Audit the AI / EiPE / Prompt Problem (see worksheet)</a:t>
             </a:r>
             <a:endParaRPr lang="en-US" sz="1400" dirty="0"/>
           </a:p>
@@ -3752,6 +3682,334 @@
       </p:grpSpPr>
       <p:sp>
         <p:nvSpPr>
+          <p:cNvPr id="2" name="Shape 0"/>
+          <p:cNvSpPr/>
+          <p:nvPr/>
+        </p:nvSpPr>
+        <p:spPr>
+          <a:xfrm>
+            <a:off x="457200" y="384048"/>
+            <a:ext cx="530352" cy="530352"/>
+          </a:xfrm>
+          <a:prstGeom prst="ellipse">
+            <a:avLst/>
+          </a:prstGeom>
+          <a:solidFill>
+            <a:srgbClr val="E35205"/>
+          </a:solidFill>
+          <a:ln/>
+          <a:effectLst>
+            <a:outerShdw sx="100000" sy="100000" kx="0" ky="0" algn="bl" rotWithShape="0" blurRad="101600" dist="38100" dir="5400000">
+              <a:srgbClr val="000000">
+                <a:alpha val="35000"/>
+              </a:srgbClr>
+            </a:outerShdw>
+          </a:effectLst>
+        </p:spPr>
+      </p:sp>
+      <p:pic>
+        <p:nvPicPr>
+          <p:cNvPr id="3" name="Image 0" descr="preencoded.png">    </p:cNvPr>
+          <p:cNvPicPr>
+            <a:picLocks noChangeAspect="1"/>
+          </p:cNvPicPr>
+          <p:nvPr/>
+        </p:nvPicPr>
+        <p:blipFill>
+          <a:blip r:embed="rId1"/>
+          <a:stretch>
+            <a:fillRect/>
+          </a:stretch>
+        </p:blipFill>
+        <p:spPr>
+          <a:xfrm>
+            <a:off x="594360" y="521208"/>
+            <a:ext cx="256032" cy="256032"/>
+          </a:xfrm>
+          <a:prstGeom prst="rect">
+            <a:avLst/>
+          </a:prstGeom>
+        </p:spPr>
+      </p:pic>
+      <p:sp>
+        <p:nvSpPr>
+          <p:cNvPr id="4" name="Text 1"/>
+          <p:cNvSpPr/>
+          <p:nvPr/>
+        </p:nvSpPr>
+        <p:spPr>
+          <a:xfrm>
+            <a:off x="1143000" y="329184"/>
+            <a:ext cx="7498080" cy="603504"/>
+          </a:xfrm>
+          <a:prstGeom prst="rect">
+            <a:avLst/>
+          </a:prstGeom>
+          <a:noFill/>
+          <a:ln/>
+        </p:spPr>
+        <p:txBody>
+          <a:bodyPr wrap="square" lIns="0" tIns="0" rIns="0" bIns="0" rtlCol="0" anchor="ctr"/>
+          <a:lstStyle/>
+          <a:p>
+            <a:pPr indent="0" marL="0">
+              <a:buNone/>
+            </a:pPr>
+            <a:r>
+              <a:rPr lang="en-US" sz="2600" b="1" dirty="0">
+                <a:solidFill>
+                  <a:srgbClr val="E6EDF3"/>
+                </a:solidFill>
+                <a:latin typeface="Arial" pitchFamily="34" charset="0"/>
+                <a:ea typeface="Arial" pitchFamily="34" charset="-122"/>
+                <a:cs typeface="Arial" pitchFamily="34" charset="-120"/>
+              </a:rPr>
+              <a:t>Key takeaways</a:t>
+            </a:r>
+            <a:endParaRPr lang="en-US" sz="2600" dirty="0"/>
+          </a:p>
+        </p:txBody>
+      </p:sp>
+      <p:sp>
+        <p:nvSpPr>
+          <p:cNvPr id="5" name="Shape 2"/>
+          <p:cNvSpPr/>
+          <p:nvPr/>
+        </p:nvSpPr>
+        <p:spPr>
+          <a:xfrm>
+            <a:off x="457200" y="1325880"/>
+            <a:ext cx="8229600" cy="1207008"/>
+          </a:xfrm>
+          <a:prstGeom prst="roundRect">
+            <a:avLst>
+              <a:gd name="adj" fmla="val 6061"/>
+            </a:avLst>
+          </a:prstGeom>
+          <a:solidFill>
+            <a:srgbClr val="18243A"/>
+          </a:solidFill>
+          <a:ln/>
+          <a:effectLst>
+            <a:outerShdw sx="100000" sy="100000" kx="0" ky="0" algn="bl" rotWithShape="0" blurRad="101600" dist="38100" dir="5400000">
+              <a:srgbClr val="000000">
+                <a:alpha val="35000"/>
+              </a:srgbClr>
+            </a:outerShdw>
+          </a:effectLst>
+        </p:spPr>
+      </p:sp>
+      <p:sp>
+        <p:nvSpPr>
+          <p:cNvPr id="6" name="Text 3"/>
+          <p:cNvSpPr/>
+          <p:nvPr/>
+        </p:nvSpPr>
+        <p:spPr>
+          <a:xfrm>
+            <a:off x="731520" y="1435608"/>
+            <a:ext cx="7680960" cy="987552"/>
+          </a:xfrm>
+          <a:prstGeom prst="rect">
+            <a:avLst/>
+          </a:prstGeom>
+          <a:noFill/>
+          <a:ln/>
+        </p:spPr>
+        <p:txBody>
+          <a:bodyPr wrap="square" lIns="0" tIns="0" rIns="0" bIns="0" rtlCol="0" anchor="t"/>
+          <a:lstStyle/>
+          <a:p>
+            <a:pPr marL="342900" indent="-342900">
+              <a:spcAft>
+                <a:spcPts val="600"/>
+              </a:spcAft>
+              <a:buSzPct val="100000"/>
+              <a:buChar char="•"/>
+            </a:pPr>
+            <a:r>
+              <a:rPr lang="en-US" sz="1400" dirty="0">
+                <a:solidFill>
+                  <a:srgbClr val="E6EDF3"/>
+                </a:solidFill>
+                <a:latin typeface="Calibri" pitchFamily="34" charset="0"/>
+                <a:ea typeface="Calibri" pitchFamily="34" charset="-122"/>
+                <a:cs typeface="Calibri" pitchFamily="34" charset="-120"/>
+              </a:rPr>
+              <a:t>Encoding ≠ encryption; hashing isn't reversible</a:t>
+            </a:r>
+            <a:endParaRPr lang="en-US" sz="1400" dirty="0"/>
+          </a:p>
+          <a:p>
+            <a:pPr marL="342900" indent="-342900">
+              <a:spcAft>
+                <a:spcPts val="600"/>
+              </a:spcAft>
+              <a:buSzPct val="100000"/>
+              <a:buChar char="•"/>
+            </a:pPr>
+            <a:r>
+              <a:rPr lang="en-US" sz="1400" dirty="0">
+                <a:solidFill>
+                  <a:srgbClr val="E6EDF3"/>
+                </a:solidFill>
+                <a:latin typeface="Calibri" pitchFamily="34" charset="0"/>
+                <a:ea typeface="Calibri" pitchFamily="34" charset="-122"/>
+                <a:cs typeface="Calibri" pitchFamily="34" charset="-120"/>
+              </a:rPr>
+              <a:t>Use vetted KDFs + authenticated encryption — never roll your own</a:t>
+            </a:r>
+            <a:endParaRPr lang="en-US" sz="1400" dirty="0"/>
+          </a:p>
+          <a:p>
+            <a:pPr marL="342900" indent="-342900">
+              <a:spcAft>
+                <a:spcPts val="600"/>
+              </a:spcAft>
+              <a:buSzPct val="100000"/>
+              <a:buChar char="•"/>
+            </a:pPr>
+            <a:r>
+              <a:rPr lang="en-US" sz="1400" dirty="0">
+                <a:solidFill>
+                  <a:srgbClr val="E6EDF3"/>
+                </a:solidFill>
+                <a:latin typeface="Calibri" pitchFamily="34" charset="0"/>
+                <a:ea typeface="Calibri" pitchFamily="34" charset="-122"/>
+                <a:cs typeface="Calibri" pitchFamily="34" charset="-120"/>
+              </a:rPr>
+              <a:t>Randomness &amp; key handling matter as much as the algorithm</a:t>
+            </a:r>
+            <a:endParaRPr lang="en-US" sz="1400" dirty="0"/>
+          </a:p>
+        </p:txBody>
+      </p:sp>
+      <p:sp>
+        <p:nvSpPr>
+          <p:cNvPr id="7" name="Text 4"/>
+          <p:cNvSpPr/>
+          <p:nvPr/>
+        </p:nvSpPr>
+        <p:spPr>
+          <a:xfrm>
+            <a:off x="457200" y="4800600"/>
+            <a:ext cx="6949440" cy="274320"/>
+          </a:xfrm>
+          <a:prstGeom prst="rect">
+            <a:avLst/>
+          </a:prstGeom>
+          <a:noFill/>
+          <a:ln/>
+        </p:spPr>
+        <p:txBody>
+          <a:bodyPr wrap="square" lIns="0" tIns="0" rIns="0" bIns="0" rtlCol="0" anchor="ctr"/>
+          <a:lstStyle/>
+          <a:p>
+            <a:pPr indent="0" marL="0">
+              <a:buNone/>
+            </a:pPr>
+            <a:r>
+              <a:rPr lang="en-US" sz="900" dirty="0">
+                <a:solidFill>
+                  <a:srgbClr val="94A3B8"/>
+                </a:solidFill>
+                <a:latin typeface="Calibri" pitchFamily="34" charset="0"/>
+                <a:ea typeface="Calibri" pitchFamily="34" charset="-122"/>
+                <a:cs typeface="Calibri" pitchFamily="34" charset="-120"/>
+              </a:rPr>
+              <a:t>Software Security · Week 3</a:t>
+            </a:r>
+            <a:endParaRPr lang="en-US" sz="900" dirty="0"/>
+          </a:p>
+        </p:txBody>
+      </p:sp>
+      <p:sp>
+        <p:nvSpPr>
+          <p:cNvPr id="8" name="Shape 5"/>
+          <p:cNvSpPr/>
+          <p:nvPr/>
+        </p:nvSpPr>
+        <p:spPr>
+          <a:xfrm>
+            <a:off x="7772400" y="4590288"/>
+            <a:ext cx="969264" cy="475488"/>
+          </a:xfrm>
+          <a:prstGeom prst="roundRect">
+            <a:avLst>
+              <a:gd name="adj" fmla="val 11538"/>
+            </a:avLst>
+          </a:prstGeom>
+          <a:solidFill>
+            <a:srgbClr val="FFFFFF"/>
+          </a:solidFill>
+          <a:ln/>
+          <a:effectLst>
+            <a:outerShdw sx="100000" sy="100000" kx="0" ky="0" algn="bl" rotWithShape="0" blurRad="101600" dist="38100" dir="5400000">
+              <a:srgbClr val="000000">
+                <a:alpha val="35000"/>
+              </a:srgbClr>
+            </a:outerShdw>
+          </a:effectLst>
+        </p:spPr>
+      </p:sp>
+      <p:pic>
+        <p:nvPicPr>
+          <p:cNvPr id="9" name="Image 1" descr="/Users/pop7/Library/CloudStorage/OneDrive-MonsterConnectCo.,Ltd/Lecture/KOSEN69 - software-security/slides/pptx/assets/logo-small.png">    </p:cNvPr>
+          <p:cNvPicPr>
+            <a:picLocks noChangeAspect="1"/>
+          </p:cNvPicPr>
+          <p:nvPr/>
+        </p:nvPicPr>
+        <p:blipFill>
+          <a:blip r:embed="rId2"/>
+          <a:stretch>
+            <a:fillRect/>
+          </a:stretch>
+        </p:blipFill>
+        <p:spPr>
+          <a:xfrm>
+            <a:off x="7872984" y="4681728"/>
+            <a:ext cx="768096" cy="356616"/>
+          </a:xfrm>
+          <a:prstGeom prst="rect">
+            <a:avLst/>
+          </a:prstGeom>
+        </p:spPr>
+      </p:pic>
+    </p:spTree>
+  </p:cSld>
+  <p:clrMapOvr>
+    <a:masterClrMapping/>
+  </p:clrMapOvr>
+</p:sld>
+</file>
+
+<file path=ppt/slides/slide15.xml><?xml version="1.0" encoding="utf-8"?>
+<p:sld xmlns:a="http://schemas.openxmlformats.org/drawingml/2006/main" xmlns:r="http://schemas.openxmlformats.org/officeDocument/2006/relationships" xmlns:p="http://schemas.openxmlformats.org/presentationml/2006/main">
+  <p:cSld name="Slide 15">
+    <p:bg>
+      <p:bgPr>
+        <a:solidFill>
+          <a:srgbClr val="0E1726"/>
+        </a:solidFill>
+      </p:bgPr>
+    </p:bg>
+    <p:spTree>
+      <p:nvGrpSpPr>
+        <p:cNvPr id="1" name=""/>
+        <p:cNvGrpSpPr/>
+        <p:nvPr/>
+      </p:nvGrpSpPr>
+      <p:grpSpPr>
+        <a:xfrm>
+          <a:off x="0" y="0"/>
+          <a:ext cx="0" cy="0"/>
+          <a:chOff x="0" y="0"/>
+          <a:chExt cx="0" cy="0"/>
+        </a:xfrm>
+      </p:grpSpPr>
+      <p:sp>
+        <p:nvSpPr>
           <p:cNvPr id="2" name="Text 0"/>
           <p:cNvSpPr/>
           <p:nvPr/>
@@ -4153,7 +4411,7 @@
                 <a:ea typeface="Calibri" pitchFamily="34" charset="-122"/>
                 <a:cs typeface="Calibri" pitchFamily="34" charset="-120"/>
               </a:rPr>
-              <a:t>🎮 Game: Capture the Hash</a:t>
+              <a:t>🔓 Game: Capture the Hash</a:t>
             </a:r>
             <a:endParaRPr lang="en-US" sz="1400" dirty="0"/>
           </a:p>
@@ -4439,7 +4697,7 @@
                 <a:ea typeface="Calibri" pitchFamily="34" charset="-122"/>
                 <a:cs typeface="Calibri" pitchFamily="34" charset="-120"/>
               </a:rPr>
-              <a:t>Tools find bugs; today we study a bug class</a:t>
+              <a:t>Tools find bug patterns; today we study one bug class deeply</a:t>
             </a:r>
             <a:endParaRPr lang="en-US" sz="1400" dirty="0"/>
           </a:p>
@@ -4460,7 +4718,7 @@
                 <a:ea typeface="Calibri" pitchFamily="34" charset="-122"/>
                 <a:cs typeface="Calibri" pitchFamily="34" charset="-120"/>
               </a:rPr>
-              <a:t>Crypto misuse is subtle — code "works" but isn't safe</a:t>
+              <a:t>Crypto misuse is subtle: code "works" but isn't safe</a:t>
             </a:r>
             <a:endParaRPr lang="en-US" sz="1400" dirty="0"/>
           </a:p>
@@ -5459,11 +5717,11 @@
         <p:spPr>
           <a:xfrm>
             <a:off x="457200" y="2697480"/>
-            <a:ext cx="8229600" cy="1042416"/>
+            <a:ext cx="8229600" cy="786384"/>
           </a:xfrm>
           <a:prstGeom prst="roundRect">
             <a:avLst>
-              <a:gd name="adj" fmla="val 5263"/>
+              <a:gd name="adj" fmla="val 6977"/>
             </a:avLst>
           </a:prstGeom>
           <a:solidFill>
@@ -5486,7 +5744,7 @@
         <p:spPr>
           <a:xfrm>
             <a:off x="640080" y="2770632"/>
-            <a:ext cx="7863840" cy="896112"/>
+            <a:ext cx="7863840" cy="640080"/>
           </a:xfrm>
           <a:prstGeom prst="rect">
             <a:avLst/>
@@ -5527,24 +5785,7 @@
                 <a:ea typeface="Courier New" pitchFamily="34" charset="-122"/>
                 <a:cs typeface="Courier New" pitchFamily="34" charset="-120"/>
               </a:rPr>
-              <a:t>ph = PasswordHasher()</a:t>
-            </a:r>
-            <a:endParaRPr lang="en-US" sz="1150" dirty="0"/>
-          </a:p>
-          <a:p>
-            <a:pPr indent="0" marL="0">
-              <a:buNone/>
-            </a:pPr>
-            <a:r>
-              <a:rPr lang="en-US" sz="1150" dirty="0">
-                <a:solidFill>
-                  <a:srgbClr val="9FE7D6"/>
-                </a:solidFill>
-                <a:latin typeface="Courier New" pitchFamily="34" charset="0"/>
-                <a:ea typeface="Courier New" pitchFamily="34" charset="-122"/>
-                <a:cs typeface="Courier New" pitchFamily="34" charset="-120"/>
-              </a:rPr>
-              <a:t>hash = ph.hash("correct horse battery staple")</a:t>
+              <a:t>ph = PasswordHasher(); hash = ph.hash("correct horse battery staple")</a:t>
             </a:r>
             <a:endParaRPr lang="en-US" sz="1150" dirty="0"/>
           </a:p>
@@ -5758,7 +5999,7 @@
                 <a:ea typeface="Arial" pitchFamily="34" charset="-122"/>
                 <a:cs typeface="Arial" pitchFamily="34" charset="-120"/>
               </a:rPr>
-              <a:t>Common crypto failures (A04:2025)</a:t>
+              <a:t>Worked example: why ECB leaks</a:t>
             </a:r>
             <a:endParaRPr lang="en-US" sz="2600" dirty="0"/>
           </a:p>
@@ -5773,11 +6014,94 @@
         <p:spPr>
           <a:xfrm>
             <a:off x="457200" y="1325880"/>
-            <a:ext cx="8229600" cy="1828800"/>
+            <a:ext cx="8229600" cy="786384"/>
           </a:xfrm>
           <a:prstGeom prst="roundRect">
             <a:avLst>
-              <a:gd name="adj" fmla="val 4000"/>
+              <a:gd name="adj" fmla="val 6977"/>
+            </a:avLst>
+          </a:prstGeom>
+          <a:solidFill>
+            <a:srgbClr val="0A1020"/>
+          </a:solidFill>
+          <a:ln w="12700">
+            <a:solidFill>
+              <a:srgbClr val="1E2B45"/>
+            </a:solidFill>
+            <a:prstDash val="solid"/>
+          </a:ln>
+        </p:spPr>
+      </p:sp>
+      <p:sp>
+        <p:nvSpPr>
+          <p:cNvPr id="6" name="Text 3"/>
+          <p:cNvSpPr/>
+          <p:nvPr/>
+        </p:nvSpPr>
+        <p:spPr>
+          <a:xfrm>
+            <a:off x="640080" y="1399032"/>
+            <a:ext cx="7863840" cy="640080"/>
+          </a:xfrm>
+          <a:prstGeom prst="rect">
+            <a:avLst/>
+          </a:prstGeom>
+          <a:noFill/>
+          <a:ln/>
+        </p:spPr>
+        <p:txBody>
+          <a:bodyPr wrap="square" lIns="0" tIns="0" rIns="0" bIns="0" rtlCol="0" anchor="t"/>
+          <a:lstStyle/>
+          <a:p>
+            <a:pPr indent="0" marL="0">
+              <a:buNone/>
+            </a:pPr>
+            <a:r>
+              <a:rPr lang="en-US" sz="1150" dirty="0">
+                <a:solidFill>
+                  <a:srgbClr val="9FE7D6"/>
+                </a:solidFill>
+                <a:latin typeface="Courier New" pitchFamily="34" charset="0"/>
+                <a:ea typeface="Courier New" pitchFamily="34" charset="-122"/>
+                <a:cs typeface="Courier New" pitchFamily="34" charset="-120"/>
+              </a:rPr>
+              <a:t>plaintext blocks:   [AAAA][AAAA][BBBB][AAAA]</a:t>
+            </a:r>
+            <a:endParaRPr lang="en-US" sz="1150" dirty="0"/>
+          </a:p>
+          <a:p>
+            <a:pPr indent="0" marL="0">
+              <a:buNone/>
+            </a:pPr>
+            <a:r>
+              <a:rPr lang="en-US" sz="1150" dirty="0">
+                <a:solidFill>
+                  <a:srgbClr val="9FE7D6"/>
+                </a:solidFill>
+                <a:latin typeface="Courier New" pitchFamily="34" charset="0"/>
+                <a:ea typeface="Courier New" pitchFamily="34" charset="-122"/>
+                <a:cs typeface="Courier New" pitchFamily="34" charset="-120"/>
+              </a:rPr>
+              <a:t>AES-ECB ciphertext: [ X  ][ X  ][ Y  ][ X  ]   ← same block → same cipher</a:t>
+            </a:r>
+            <a:endParaRPr lang="en-US" sz="1150" dirty="0"/>
+          </a:p>
+        </p:txBody>
+      </p:sp>
+      <p:sp>
+        <p:nvSpPr>
+          <p:cNvPr id="7" name="Shape 4"/>
+          <p:cNvSpPr/>
+          <p:nvPr/>
+        </p:nvSpPr>
+        <p:spPr>
+          <a:xfrm>
+            <a:off x="457200" y="2276856"/>
+            <a:ext cx="8229600" cy="1207008"/>
+          </a:xfrm>
+          <a:prstGeom prst="roundRect">
+            <a:avLst>
+              <a:gd name="adj" fmla="val 6061"/>
             </a:avLst>
           </a:prstGeom>
           <a:solidFill>
@@ -5795,14 +6119,14 @@
       </p:sp>
       <p:sp>
         <p:nvSpPr>
-          <p:cNvPr id="6" name="Text 3"/>
-          <p:cNvSpPr/>
-          <p:nvPr/>
-        </p:nvSpPr>
-        <p:spPr>
-          <a:xfrm>
-            <a:off x="731520" y="1435608"/>
-            <a:ext cx="7680960" cy="1609344"/>
+          <p:cNvPr id="8" name="Text 5"/>
+          <p:cNvSpPr/>
+          <p:nvPr/>
+        </p:nvSpPr>
+        <p:spPr>
+          <a:xfrm>
+            <a:off x="731520" y="2386584"/>
+            <a:ext cx="7680960" cy="987552"/>
           </a:xfrm>
           <a:prstGeom prst="rect">
             <a:avLst/>
@@ -5830,7 +6154,7 @@
                 <a:ea typeface="Calibri" pitchFamily="34" charset="-122"/>
                 <a:cs typeface="Calibri" pitchFamily="34" charset="-120"/>
               </a:rPr>
-              <a:t>ECB mode → identical plaintext blocks leak patterns</a:t>
+              <a:t>ECB encrypts each block independently → patterns survive</a:t>
             </a:r>
             <a:endParaRPr lang="en-US" sz="1400" dirty="0"/>
           </a:p>
@@ -5851,7 +6175,7 @@
                 <a:ea typeface="Calibri" pitchFamily="34" charset="-122"/>
                 <a:cs typeface="Calibri" pitchFamily="34" charset="-120"/>
               </a:rPr>
-              <a:t>Hardcoded keys / keys in source</a:t>
+              <a:t>The classic "ECB penguin": the image is still recognizable encrypted</a:t>
             </a:r>
             <a:endParaRPr lang="en-US" sz="1400" dirty="0"/>
           </a:p>
@@ -5872,87 +6196,45 @@
                 <a:ea typeface="Calibri" pitchFamily="34" charset="-122"/>
                 <a:cs typeface="Calibri" pitchFamily="34" charset="-120"/>
               </a:rPr>
-              <a:t>Weak RNG (random instead of secrets/CSPRNG)</a:t>
+              <a:t>Fix: an authenticated mode (AES-GCM) with a random nonce</a:t>
             </a:r>
             <a:endParaRPr lang="en-US" sz="1400" dirty="0"/>
           </a:p>
-          <a:p>
-            <a:pPr marL="342900" indent="-342900">
-              <a:spcAft>
-                <a:spcPts val="600"/>
-              </a:spcAft>
-              <a:buSzPct val="100000"/>
-              <a:buChar char="•"/>
-            </a:pPr>
-            <a:r>
-              <a:rPr lang="en-US" sz="1400" dirty="0">
-                <a:solidFill>
-                  <a:srgbClr val="E6EDF3"/>
+        </p:txBody>
+      </p:sp>
+      <p:sp>
+        <p:nvSpPr>
+          <p:cNvPr id="9" name="Text 6"/>
+          <p:cNvSpPr/>
+          <p:nvPr/>
+        </p:nvSpPr>
+        <p:spPr>
+          <a:xfrm>
+            <a:off x="457200" y="4800600"/>
+            <a:ext cx="6949440" cy="274320"/>
+          </a:xfrm>
+          <a:prstGeom prst="rect">
+            <a:avLst/>
+          </a:prstGeom>
+          <a:noFill/>
+          <a:ln/>
+        </p:spPr>
+        <p:txBody>
+          <a:bodyPr wrap="square" lIns="0" tIns="0" rIns="0" bIns="0" rtlCol="0" anchor="ctr"/>
+          <a:lstStyle/>
+          <a:p>
+            <a:pPr indent="0" marL="0">
+              <a:buNone/>
+            </a:pPr>
+            <a:r>
+              <a:rPr lang="en-US" sz="900" dirty="0">
+                <a:solidFill>
+                  <a:srgbClr val="94A3B8"/>
                 </a:solidFill>
                 <a:latin typeface="Calibri" pitchFamily="34" charset="0"/>
                 <a:ea typeface="Calibri" pitchFamily="34" charset="-122"/>
                 <a:cs typeface="Calibri" pitchFamily="34" charset="-120"/>
               </a:rPr>
-              <a:t>MD5 / SHA-1 for security</a:t>
-            </a:r>
-            <a:endParaRPr lang="en-US" sz="1400" dirty="0"/>
-          </a:p>
-          <a:p>
-            <a:pPr marL="342900" indent="-342900">
-              <a:spcAft>
-                <a:spcPts val="600"/>
-              </a:spcAft>
-              <a:buSzPct val="100000"/>
-              <a:buChar char="•"/>
-            </a:pPr>
-            <a:r>
-              <a:rPr lang="en-US" sz="1400" dirty="0">
-                <a:solidFill>
-                  <a:srgbClr val="E6EDF3"/>
-                </a:solidFill>
-                <a:latin typeface="Calibri" pitchFamily="34" charset="0"/>
-                <a:ea typeface="Calibri" pitchFamily="34" charset="-122"/>
-                <a:cs typeface="Calibri" pitchFamily="34" charset="-120"/>
-              </a:rPr>
-              <a:t>Unauthenticated encryption (no integrity)</a:t>
-            </a:r>
-            <a:endParaRPr lang="en-US" sz="1400" dirty="0"/>
-          </a:p>
-        </p:txBody>
-      </p:sp>
-      <p:sp>
-        <p:nvSpPr>
-          <p:cNvPr id="7" name="Text 4"/>
-          <p:cNvSpPr/>
-          <p:nvPr/>
-        </p:nvSpPr>
-        <p:spPr>
-          <a:xfrm>
-            <a:off x="457200" y="4800600"/>
-            <a:ext cx="6949440" cy="274320"/>
-          </a:xfrm>
-          <a:prstGeom prst="rect">
-            <a:avLst/>
-          </a:prstGeom>
-          <a:noFill/>
-          <a:ln/>
-        </p:spPr>
-        <p:txBody>
-          <a:bodyPr wrap="square" lIns="0" tIns="0" rIns="0" bIns="0" rtlCol="0" anchor="ctr"/>
-          <a:lstStyle/>
-          <a:p>
-            <a:pPr indent="0" marL="0">
-              <a:buNone/>
-            </a:pPr>
-            <a:r>
-              <a:rPr lang="en-US" sz="900" dirty="0">
-                <a:solidFill>
-                  <a:srgbClr val="94A3B8"/>
-                </a:solidFill>
-                <a:latin typeface="Calibri" pitchFamily="34" charset="0"/>
-                <a:ea typeface="Calibri" pitchFamily="34" charset="-122"/>
-                <a:cs typeface="Calibri" pitchFamily="34" charset="-120"/>
-              </a:rPr>
               <a:t>Software Security · Week 3</a:t>
             </a:r>
             <a:endParaRPr lang="en-US" sz="900" dirty="0"/>
@@ -5961,7 +6243,7 @@
       </p:sp>
       <p:sp>
         <p:nvSpPr>
-          <p:cNvPr id="8" name="Shape 5"/>
+          <p:cNvPr id="10" name="Shape 7"/>
           <p:cNvSpPr/>
           <p:nvPr/>
         </p:nvSpPr>
@@ -5990,7 +6272,7 @@
       </p:sp>
       <p:pic>
         <p:nvPicPr>
-          <p:cNvPr id="9" name="Image 1" descr="/Users/pop7/Library/CloudStorage/OneDrive-MonsterConnectCo.,Ltd/Lecture/KOSEN69 - software-security/slides/pptx/assets/logo-small.png">    </p:cNvPr>
+          <p:cNvPr id="11" name="Image 1" descr="/Users/pop7/Library/CloudStorage/OneDrive-MonsterConnectCo.,Ltd/Lecture/KOSEN69 - software-security/slides/pptx/assets/logo-small.png">    </p:cNvPr>
           <p:cNvPicPr>
             <a:picLocks noChangeAspect="1"/>
           </p:cNvPicPr>
@@ -6128,7 +6410,7 @@
                 <a:ea typeface="Arial" pitchFamily="34" charset="-122"/>
                 <a:cs typeface="Arial" pitchFamily="34" charset="-120"/>
               </a:rPr>
-              <a:t>Why ECB is broken (the penguin)</a:t>
+              <a:t>Capture the Hash — how cracking works</a:t>
             </a:r>
             <a:endParaRPr lang="en-US" sz="2600" dirty="0"/>
           </a:p>
@@ -6143,11 +6425,94 @@
         <p:spPr>
           <a:xfrm>
             <a:off x="457200" y="1325880"/>
-            <a:ext cx="8229600" cy="1207008"/>
+            <a:ext cx="8229600" cy="786384"/>
           </a:xfrm>
           <a:prstGeom prst="roundRect">
             <a:avLst>
-              <a:gd name="adj" fmla="val 6061"/>
+              <a:gd name="adj" fmla="val 6977"/>
+            </a:avLst>
+          </a:prstGeom>
+          <a:solidFill>
+            <a:srgbClr val="0A1020"/>
+          </a:solidFill>
+          <a:ln w="12700">
+            <a:solidFill>
+              <a:srgbClr val="1E2B45"/>
+            </a:solidFill>
+            <a:prstDash val="solid"/>
+          </a:ln>
+        </p:spPr>
+      </p:sp>
+      <p:sp>
+        <p:nvSpPr>
+          <p:cNvPr id="6" name="Text 3"/>
+          <p:cNvSpPr/>
+          <p:nvPr/>
+        </p:nvSpPr>
+        <p:spPr>
+          <a:xfrm>
+            <a:off x="640080" y="1399032"/>
+            <a:ext cx="7863840" cy="640080"/>
+          </a:xfrm>
+          <a:prstGeom prst="rect">
+            <a:avLst/>
+          </a:prstGeom>
+          <a:noFill/>
+          <a:ln/>
+        </p:spPr>
+        <p:txBody>
+          <a:bodyPr wrap="square" lIns="0" tIns="0" rIns="0" bIns="0" rtlCol="0" anchor="t"/>
+          <a:lstStyle/>
+          <a:p>
+            <a:pPr indent="0" marL="0">
+              <a:buNone/>
+            </a:pPr>
+            <a:r>
+              <a:rPr lang="en-US" sz="1150" dirty="0">
+                <a:solidFill>
+                  <a:srgbClr val="9FE7D6"/>
+                </a:solidFill>
+                <a:latin typeface="Courier New" pitchFamily="34" charset="0"/>
+                <a:ea typeface="Courier New" pitchFamily="34" charset="-122"/>
+                <a:cs typeface="Courier New" pitchFamily="34" charset="-120"/>
+              </a:rPr>
+              <a:t># strip comments, then crack unsalted MD5 with a wordlist</a:t>
+            </a:r>
+            <a:endParaRPr lang="en-US" sz="1150" dirty="0"/>
+          </a:p>
+          <a:p>
+            <a:pPr indent="0" marL="0">
+              <a:buNone/>
+            </a:pPr>
+            <a:r>
+              <a:rPr lang="en-US" sz="1150" dirty="0">
+                <a:solidFill>
+                  <a:srgbClr val="9FE7D6"/>
+                </a:solidFill>
+                <a:latin typeface="Courier New" pitchFamily="34" charset="0"/>
+                <a:ea typeface="Courier New" pitchFamily="34" charset="-122"/>
+                <a:cs typeface="Courier New" pitchFamily="34" charset="-120"/>
+              </a:rPr>
+              <a:t>hashcat -m 0 hashes.txt rockyou.txt</a:t>
+            </a:r>
+            <a:endParaRPr lang="en-US" sz="1150" dirty="0"/>
+          </a:p>
+        </p:txBody>
+      </p:sp>
+      <p:sp>
+        <p:nvSpPr>
+          <p:cNvPr id="7" name="Shape 4"/>
+          <p:cNvSpPr/>
+          <p:nvPr/>
+        </p:nvSpPr>
+        <p:spPr>
+          <a:xfrm>
+            <a:off x="457200" y="2276856"/>
+            <a:ext cx="8229600" cy="896112"/>
+          </a:xfrm>
+          <a:prstGeom prst="roundRect">
+            <a:avLst>
+              <a:gd name="adj" fmla="val 8163"/>
             </a:avLst>
           </a:prstGeom>
           <a:solidFill>
@@ -6165,14 +6530,14 @@
       </p:sp>
       <p:sp>
         <p:nvSpPr>
-          <p:cNvPr id="6" name="Text 3"/>
-          <p:cNvSpPr/>
-          <p:nvPr/>
-        </p:nvSpPr>
-        <p:spPr>
-          <a:xfrm>
-            <a:off x="731520" y="1435608"/>
-            <a:ext cx="7680960" cy="987552"/>
+          <p:cNvPr id="8" name="Text 5"/>
+          <p:cNvSpPr/>
+          <p:nvPr/>
+        </p:nvSpPr>
+        <p:spPr>
+          <a:xfrm>
+            <a:off x="731520" y="2386584"/>
+            <a:ext cx="7680960" cy="676656"/>
           </a:xfrm>
           <a:prstGeom prst="rect">
             <a:avLst/>
@@ -6200,7 +6565,7 @@
                 <a:ea typeface="Calibri" pitchFamily="34" charset="-122"/>
                 <a:cs typeface="Calibri" pitchFamily="34" charset="-120"/>
               </a:rPr>
-              <a:t>ECB encrypts each block independently</a:t>
+              <a:t>Unsalted fast hash → attacker hashes wordlist once, matches millions</a:t>
             </a:r>
             <a:endParaRPr lang="en-US" sz="1400" dirty="0"/>
           </a:p>
@@ -6221,66 +6586,45 @@
                 <a:ea typeface="Calibri" pitchFamily="34" charset="-122"/>
                 <a:cs typeface="Calibri" pitchFamily="34" charset="-120"/>
               </a:rPr>
-              <a:t>Same plaintext block → same ciphertext block</a:t>
+              <a:t>Salt would force per-guess work; a slow KDF makes it infeasible</a:t>
             </a:r>
             <a:endParaRPr lang="en-US" sz="1400" dirty="0"/>
           </a:p>
-          <a:p>
-            <a:pPr marL="342900" indent="-342900">
-              <a:spcAft>
-                <a:spcPts val="600"/>
-              </a:spcAft>
-              <a:buSzPct val="100000"/>
-              <a:buChar char="•"/>
-            </a:pPr>
-            <a:r>
-              <a:rPr lang="en-US" sz="1400" dirty="0">
-                <a:solidFill>
-                  <a:srgbClr val="E6EDF3"/>
+        </p:txBody>
+      </p:sp>
+      <p:sp>
+        <p:nvSpPr>
+          <p:cNvPr id="9" name="Text 6"/>
+          <p:cNvSpPr/>
+          <p:nvPr/>
+        </p:nvSpPr>
+        <p:spPr>
+          <a:xfrm>
+            <a:off x="457200" y="4800600"/>
+            <a:ext cx="6949440" cy="274320"/>
+          </a:xfrm>
+          <a:prstGeom prst="rect">
+            <a:avLst/>
+          </a:prstGeom>
+          <a:noFill/>
+          <a:ln/>
+        </p:spPr>
+        <p:txBody>
+          <a:bodyPr wrap="square" lIns="0" tIns="0" rIns="0" bIns="0" rtlCol="0" anchor="ctr"/>
+          <a:lstStyle/>
+          <a:p>
+            <a:pPr indent="0" marL="0">
+              <a:buNone/>
+            </a:pPr>
+            <a:r>
+              <a:rPr lang="en-US" sz="900" dirty="0">
+                <a:solidFill>
+                  <a:srgbClr val="94A3B8"/>
                 </a:solidFill>
                 <a:latin typeface="Calibri" pitchFamily="34" charset="0"/>
                 <a:ea typeface="Calibri" pitchFamily="34" charset="-122"/>
                 <a:cs typeface="Calibri" pitchFamily="34" charset="-120"/>
               </a:rPr>
-              <a:t>Structure/patterns survive encryption → leakage</a:t>
-            </a:r>
-            <a:endParaRPr lang="en-US" sz="1400" dirty="0"/>
-          </a:p>
-        </p:txBody>
-      </p:sp>
-      <p:sp>
-        <p:nvSpPr>
-          <p:cNvPr id="7" name="Text 4"/>
-          <p:cNvSpPr/>
-          <p:nvPr/>
-        </p:nvSpPr>
-        <p:spPr>
-          <a:xfrm>
-            <a:off x="457200" y="4800600"/>
-            <a:ext cx="6949440" cy="274320"/>
-          </a:xfrm>
-          <a:prstGeom prst="rect">
-            <a:avLst/>
-          </a:prstGeom>
-          <a:noFill/>
-          <a:ln/>
-        </p:spPr>
-        <p:txBody>
-          <a:bodyPr wrap="square" lIns="0" tIns="0" rIns="0" bIns="0" rtlCol="0" anchor="ctr"/>
-          <a:lstStyle/>
-          <a:p>
-            <a:pPr indent="0" marL="0">
-              <a:buNone/>
-            </a:pPr>
-            <a:r>
-              <a:rPr lang="en-US" sz="900" dirty="0">
-                <a:solidFill>
-                  <a:srgbClr val="94A3B8"/>
-                </a:solidFill>
-                <a:latin typeface="Calibri" pitchFamily="34" charset="0"/>
-                <a:ea typeface="Calibri" pitchFamily="34" charset="-122"/>
-                <a:cs typeface="Calibri" pitchFamily="34" charset="-120"/>
-              </a:rPr>
               <a:t>Software Security · Week 3</a:t>
             </a:r>
             <a:endParaRPr lang="en-US" sz="900" dirty="0"/>
@@ -6289,7 +6633,7 @@
       </p:sp>
       <p:sp>
         <p:nvSpPr>
-          <p:cNvPr id="8" name="Shape 5"/>
+          <p:cNvPr id="10" name="Shape 7"/>
           <p:cNvSpPr/>
           <p:nvPr/>
         </p:nvSpPr>
@@ -6318,7 +6662,7 @@
       </p:sp>
       <p:pic>
         <p:nvPicPr>
-          <p:cNvPr id="9" name="Image 1" descr="/Users/pop7/Library/CloudStorage/OneDrive-MonsterConnectCo.,Ltd/Lecture/KOSEN69 - software-security/slides/pptx/assets/logo-small.png">    </p:cNvPr>
+          <p:cNvPr id="11" name="Image 1" descr="/Users/pop7/Library/CloudStorage/OneDrive-MonsterConnectCo.,Ltd/Lecture/KOSEN69 - software-security/slides/pptx/assets/logo-small.png">    </p:cNvPr>
           <p:cNvPicPr>
             <a:picLocks noChangeAspect="1"/>
           </p:cNvPicPr>
@@ -6456,7 +6800,7 @@
                 <a:ea typeface="Arial" pitchFamily="34" charset="-122"/>
                 <a:cs typeface="Arial" pitchFamily="34" charset="-120"/>
               </a:rPr>
-              <a:t>Do this instead</a:t>
+              <a:t>Common crypto failures (A04:2025)</a:t>
             </a:r>
             <a:endParaRPr lang="en-US" sz="2600" dirty="0"/>
           </a:p>
@@ -6528,7 +6872,7 @@
                 <a:ea typeface="Calibri" pitchFamily="34" charset="-122"/>
                 <a:cs typeface="Calibri" pitchFamily="34" charset="-120"/>
               </a:rPr>
-              <a:t>Authenticated encryption: AES-GCM or ChaCha20-Poly1305</a:t>
+              <a:t>ECB mode → block patterns leak</a:t>
             </a:r>
             <a:endParaRPr lang="en-US" sz="1400" dirty="0"/>
           </a:p>
@@ -6549,7 +6893,7 @@
                 <a:ea typeface="Calibri" pitchFamily="34" charset="-122"/>
                 <a:cs typeface="Calibri" pitchFamily="34" charset="-120"/>
               </a:rPr>
-              <a:t>Keys from a secrets manager / KMS — never in code</a:t>
+              <a:t>Hardcoded keys / keys in source (CWE-798)</a:t>
             </a:r>
             <a:endParaRPr lang="en-US" sz="1400" dirty="0"/>
           </a:p>
@@ -6570,7 +6914,7 @@
                 <a:ea typeface="Calibri" pitchFamily="34" charset="-122"/>
                 <a:cs typeface="Calibri" pitchFamily="34" charset="-120"/>
               </a:rPr>
-              <a:t>CSPRNG: secrets (Python), crypto.randomBytes (Node)</a:t>
+              <a:t>Weak RNG (random instead of secrets/CSPRNG) (CWE-330)</a:t>
             </a:r>
             <a:endParaRPr lang="en-US" sz="1400" dirty="0"/>
           </a:p>
@@ -6591,7 +6935,7 @@
                 <a:ea typeface="Calibri" pitchFamily="34" charset="-122"/>
                 <a:cs typeface="Calibri" pitchFamily="34" charset="-120"/>
               </a:rPr>
-              <a:t>SHA-256+ for integrity; argon2id/bcrypt for passwords</a:t>
+              <a:t>MD5 / SHA-1 for security; unauthenticated encryption (no integrity)</a:t>
             </a:r>
             <a:endParaRPr lang="en-US" sz="1400" dirty="0"/>
           </a:p>

--- a/slides/pptx/week03.pptx
+++ b/slides/pptx/week03.pptx
@@ -2103,7 +2103,7 @@
     <p:bg>
       <p:bgPr>
         <a:solidFill>
-          <a:srgbClr val="0E1726"/>
+          <a:srgbClr val="FFFFFF"/>
         </a:solidFill>
       </p:bgPr>
     </p:bg>
@@ -2121,38 +2121,9 @@
           <a:chExt cx="0" cy="0"/>
         </a:xfrm>
       </p:grpSpPr>
-      <p:sp>
-        <p:nvSpPr>
-          <p:cNvPr id="2" name="Shape 0"/>
-          <p:cNvSpPr/>
-          <p:nvPr/>
-        </p:nvSpPr>
-        <p:spPr>
-          <a:xfrm>
-            <a:off x="603504" y="411480"/>
-            <a:ext cx="1874520" cy="932688"/>
-          </a:xfrm>
-          <a:prstGeom prst="roundRect">
-            <a:avLst>
-              <a:gd name="adj" fmla="val 7843"/>
-            </a:avLst>
-          </a:prstGeom>
-          <a:solidFill>
-            <a:srgbClr val="FFFFFF"/>
-          </a:solidFill>
-          <a:ln/>
-          <a:effectLst>
-            <a:outerShdw sx="100000" sy="100000" kx="0" ky="0" algn="bl" rotWithShape="0" blurRad="101600" dist="38100" dir="5400000">
-              <a:srgbClr val="000000">
-                <a:alpha val="35000"/>
-              </a:srgbClr>
-            </a:outerShdw>
-          </a:effectLst>
-        </p:spPr>
-      </p:sp>
       <p:pic>
         <p:nvPicPr>
-          <p:cNvPr id="3" name="Image 0" descr="/Users/pop7/Library/CloudStorage/OneDrive-MonsterConnectCo.,Ltd/Lecture/KOSEN69 - software-security/slides/pptx/assets/logo-small.png">    </p:cNvPr>
+          <p:cNvPr id="2" name="Image 0" descr="/Users/pop7/Library/CloudStorage/OneDrive-MonsterConnectCo.,Ltd/Lecture/KOSEN69 - software-security/slides/pptx/assets/logo-small.png">    </p:cNvPr>
           <p:cNvPicPr>
             <a:picLocks noChangeAspect="1"/>
           </p:cNvPicPr>
@@ -2166,8 +2137,8 @@
         </p:blipFill>
         <p:spPr>
           <a:xfrm>
-            <a:off x="758952" y="566928"/>
-            <a:ext cx="1563624" cy="621792"/>
+            <a:off x="640080" y="502920"/>
+            <a:ext cx="1691640" cy="676656"/>
           </a:xfrm>
           <a:prstGeom prst="rect">
             <a:avLst/>
@@ -2176,7 +2147,7 @@
       </p:pic>
       <p:sp>
         <p:nvSpPr>
-          <p:cNvPr id="4" name="Text 1"/>
+          <p:cNvPr id="3" name="Text 0"/>
           <p:cNvSpPr/>
           <p:nvPr/>
         </p:nvSpPr>
@@ -2215,7 +2186,7 @@
       </p:sp>
       <p:sp>
         <p:nvSpPr>
-          <p:cNvPr id="5" name="Text 2"/>
+          <p:cNvPr id="4" name="Text 1"/>
           <p:cNvSpPr/>
           <p:nvPr/>
         </p:nvSpPr>
@@ -2243,7 +2214,7 @@
             <a:r>
               <a:rPr lang="en-US" sz="4000" b="1" dirty="0">
                 <a:solidFill>
-                  <a:srgbClr val="E6EDF3"/>
+                  <a:srgbClr val="1F2937"/>
                 </a:solidFill>
                 <a:latin typeface="Arial" pitchFamily="34" charset="0"/>
                 <a:ea typeface="Arial" pitchFamily="34" charset="-122"/>
@@ -2257,7 +2228,7 @@
       </p:sp>
       <p:sp>
         <p:nvSpPr>
-          <p:cNvPr id="6" name="Text 3"/>
+          <p:cNvPr id="5" name="Text 2"/>
           <p:cNvSpPr/>
           <p:nvPr/>
         </p:nvSpPr>
@@ -2282,7 +2253,7 @@
             <a:r>
               <a:rPr lang="en-US" sz="1400" dirty="0">
                 <a:solidFill>
-                  <a:srgbClr val="94A3B8"/>
+                  <a:srgbClr val="64748B"/>
                 </a:solidFill>
                 <a:latin typeface="Calibri" pitchFamily="34" charset="0"/>
                 <a:ea typeface="Calibri" pitchFamily="34" charset="-122"/>
@@ -2308,7 +2279,7 @@
     <p:bg>
       <p:bgPr>
         <a:solidFill>
-          <a:srgbClr val="0E1726"/>
+          <a:srgbClr val="FFFFFF"/>
         </a:solidFill>
       </p:bgPr>
     </p:bg>
@@ -2345,9 +2316,9 @@
           </a:solidFill>
           <a:ln/>
           <a:effectLst>
-            <a:outerShdw sx="100000" sy="100000" kx="0" ky="0" algn="bl" rotWithShape="0" blurRad="101600" dist="38100" dir="5400000">
+            <a:outerShdw sx="100000" sy="100000" kx="0" ky="0" algn="bl" rotWithShape="0" blurRad="76200" dist="25400" dir="5400000">
               <a:srgbClr val="000000">
-                <a:alpha val="35000"/>
+                <a:alpha val="12000"/>
               </a:srgbClr>
             </a:outerShdw>
           </a:effectLst>
@@ -2404,7 +2375,7 @@
             <a:r>
               <a:rPr lang="en-US" sz="2600" b="1" dirty="0">
                 <a:solidFill>
-                  <a:srgbClr val="E6EDF3"/>
+                  <a:srgbClr val="1F2937"/>
                 </a:solidFill>
                 <a:latin typeface="Arial" pitchFamily="34" charset="0"/>
                 <a:ea typeface="Arial" pitchFamily="34" charset="-122"/>
@@ -2433,13 +2404,13 @@
             </a:avLst>
           </a:prstGeom>
           <a:solidFill>
-            <a:srgbClr val="18243A"/>
+            <a:srgbClr val="F1F5F9"/>
           </a:solidFill>
           <a:ln/>
           <a:effectLst>
-            <a:outerShdw sx="100000" sy="100000" kx="0" ky="0" algn="bl" rotWithShape="0" blurRad="101600" dist="38100" dir="5400000">
+            <a:outerShdw sx="100000" sy="100000" kx="0" ky="0" algn="bl" rotWithShape="0" blurRad="76200" dist="25400" dir="5400000">
               <a:srgbClr val="000000">
-                <a:alpha val="35000"/>
+                <a:alpha val="12000"/>
               </a:srgbClr>
             </a:outerShdw>
           </a:effectLst>
@@ -2476,7 +2447,7 @@
             <a:r>
               <a:rPr lang="en-US" sz="1400" dirty="0">
                 <a:solidFill>
-                  <a:srgbClr val="E6EDF3"/>
+                  <a:srgbClr val="1F2937"/>
                 </a:solidFill>
                 <a:latin typeface="Calibri" pitchFamily="34" charset="0"/>
                 <a:ea typeface="Calibri" pitchFamily="34" charset="-122"/>
@@ -2497,7 +2468,7 @@
             <a:r>
               <a:rPr lang="en-US" sz="1400" dirty="0">
                 <a:solidFill>
-                  <a:srgbClr val="E6EDF3"/>
+                  <a:srgbClr val="1F2937"/>
                 </a:solidFill>
                 <a:latin typeface="Calibri" pitchFamily="34" charset="0"/>
                 <a:ea typeface="Calibri" pitchFamily="34" charset="-122"/>
@@ -2518,7 +2489,7 @@
             <a:r>
               <a:rPr lang="en-US" sz="1400" dirty="0">
                 <a:solidFill>
-                  <a:srgbClr val="E6EDF3"/>
+                  <a:srgbClr val="1F2937"/>
                 </a:solidFill>
                 <a:latin typeface="Calibri" pitchFamily="34" charset="0"/>
                 <a:ea typeface="Calibri" pitchFamily="34" charset="-122"/>
@@ -2539,7 +2510,7 @@
             <a:r>
               <a:rPr lang="en-US" sz="1400" dirty="0">
                 <a:solidFill>
-                  <a:srgbClr val="E6EDF3"/>
+                  <a:srgbClr val="1F2937"/>
                 </a:solidFill>
                 <a:latin typeface="Calibri" pitchFamily="34" charset="0"/>
                 <a:ea typeface="Calibri" pitchFamily="34" charset="-122"/>
@@ -2578,7 +2549,7 @@
             <a:r>
               <a:rPr lang="en-US" sz="900" dirty="0">
                 <a:solidFill>
-                  <a:srgbClr val="94A3B8"/>
+                  <a:srgbClr val="64748B"/>
                 </a:solidFill>
                 <a:latin typeface="Calibri" pitchFamily="34" charset="0"/>
                 <a:ea typeface="Calibri" pitchFamily="34" charset="-122"/>
@@ -2590,38 +2561,9 @@
           </a:p>
         </p:txBody>
       </p:sp>
-      <p:sp>
-        <p:nvSpPr>
-          <p:cNvPr id="8" name="Shape 5"/>
-          <p:cNvSpPr/>
-          <p:nvPr/>
-        </p:nvSpPr>
-        <p:spPr>
-          <a:xfrm>
-            <a:off x="7772400" y="4590288"/>
-            <a:ext cx="969264" cy="475488"/>
-          </a:xfrm>
-          <a:prstGeom prst="roundRect">
-            <a:avLst>
-              <a:gd name="adj" fmla="val 11538"/>
-            </a:avLst>
-          </a:prstGeom>
-          <a:solidFill>
-            <a:srgbClr val="FFFFFF"/>
-          </a:solidFill>
-          <a:ln/>
-          <a:effectLst>
-            <a:outerShdw sx="100000" sy="100000" kx="0" ky="0" algn="bl" rotWithShape="0" blurRad="101600" dist="38100" dir="5400000">
-              <a:srgbClr val="000000">
-                <a:alpha val="35000"/>
-              </a:srgbClr>
-            </a:outerShdw>
-          </a:effectLst>
-        </p:spPr>
-      </p:sp>
       <p:pic>
         <p:nvPicPr>
-          <p:cNvPr id="9" name="Image 1" descr="/Users/pop7/Library/CloudStorage/OneDrive-MonsterConnectCo.,Ltd/Lecture/KOSEN69 - software-security/slides/pptx/assets/logo-small.png">    </p:cNvPr>
+          <p:cNvPr id="8" name="Image 1" descr="/Users/pop7/Library/CloudStorage/OneDrive-MonsterConnectCo.,Ltd/Lecture/KOSEN69 - software-security/slides/pptx/assets/logo-small.png">    </p:cNvPr>
           <p:cNvPicPr>
             <a:picLocks noChangeAspect="1"/>
           </p:cNvPicPr>
@@ -2635,7 +2577,7 @@
         </p:blipFill>
         <p:spPr>
           <a:xfrm>
-            <a:off x="7872984" y="4681728"/>
+            <a:off x="7882128" y="4700016"/>
             <a:ext cx="768096" cy="356616"/>
           </a:xfrm>
           <a:prstGeom prst="rect">
@@ -2657,7 +2599,7 @@
     <p:bg>
       <p:bgPr>
         <a:solidFill>
-          <a:srgbClr val="0E1726"/>
+          <a:srgbClr val="FFFFFF"/>
         </a:solidFill>
       </p:bgPr>
     </p:bg>
@@ -2694,9 +2636,9 @@
           </a:solidFill>
           <a:ln/>
           <a:effectLst>
-            <a:outerShdw sx="100000" sy="100000" kx="0" ky="0" algn="bl" rotWithShape="0" blurRad="101600" dist="38100" dir="5400000">
+            <a:outerShdw sx="100000" sy="100000" kx="0" ky="0" algn="bl" rotWithShape="0" blurRad="76200" dist="25400" dir="5400000">
               <a:srgbClr val="000000">
-                <a:alpha val="35000"/>
+                <a:alpha val="12000"/>
               </a:srgbClr>
             </a:outerShdw>
           </a:effectLst>
@@ -2753,7 +2695,7 @@
             <a:r>
               <a:rPr lang="en-US" sz="2600" b="1" dirty="0">
                 <a:solidFill>
-                  <a:srgbClr val="E6EDF3"/>
+                  <a:srgbClr val="1F2937"/>
                 </a:solidFill>
                 <a:latin typeface="Arial" pitchFamily="34" charset="0"/>
                 <a:ea typeface="Arial" pitchFamily="34" charset="-122"/>
@@ -2782,13 +2724,13 @@
             </a:avLst>
           </a:prstGeom>
           <a:solidFill>
-            <a:srgbClr val="18243A"/>
+            <a:srgbClr val="F1F5F9"/>
           </a:solidFill>
           <a:ln/>
           <a:effectLst>
-            <a:outerShdw sx="100000" sy="100000" kx="0" ky="0" algn="bl" rotWithShape="0" blurRad="101600" dist="38100" dir="5400000">
+            <a:outerShdw sx="100000" sy="100000" kx="0" ky="0" algn="bl" rotWithShape="0" blurRad="76200" dist="25400" dir="5400000">
               <a:srgbClr val="000000">
-                <a:alpha val="35000"/>
+                <a:alpha val="12000"/>
               </a:srgbClr>
             </a:outerShdw>
           </a:effectLst>
@@ -2825,7 +2767,7 @@
             <a:r>
               <a:rPr lang="en-US" sz="1400" dirty="0">
                 <a:solidFill>
-                  <a:srgbClr val="E6EDF3"/>
+                  <a:srgbClr val="1F2937"/>
                 </a:solidFill>
                 <a:latin typeface="Calibri" pitchFamily="34" charset="0"/>
                 <a:ea typeface="Calibri" pitchFamily="34" charset="-122"/>
@@ -2846,7 +2788,7 @@
             <a:r>
               <a:rPr lang="en-US" sz="1400" dirty="0">
                 <a:solidFill>
-                  <a:srgbClr val="E6EDF3"/>
+                  <a:srgbClr val="1F2937"/>
                 </a:solidFill>
                 <a:latin typeface="Calibri" pitchFamily="34" charset="0"/>
                 <a:ea typeface="Calibri" pitchFamily="34" charset="-122"/>
@@ -2867,7 +2809,7 @@
             <a:r>
               <a:rPr lang="en-US" sz="1400" dirty="0">
                 <a:solidFill>
-                  <a:srgbClr val="E6EDF3"/>
+                  <a:srgbClr val="1F2937"/>
                 </a:solidFill>
                 <a:latin typeface="Calibri" pitchFamily="34" charset="0"/>
                 <a:ea typeface="Calibri" pitchFamily="34" charset="-122"/>
@@ -2888,7 +2830,7 @@
             <a:r>
               <a:rPr lang="en-US" sz="1400" dirty="0">
                 <a:solidFill>
-                  <a:srgbClr val="E6EDF3"/>
+                  <a:srgbClr val="1F2937"/>
                 </a:solidFill>
                 <a:latin typeface="Calibri" pitchFamily="34" charset="0"/>
                 <a:ea typeface="Calibri" pitchFamily="34" charset="-122"/>
@@ -2927,7 +2869,7 @@
             <a:r>
               <a:rPr lang="en-US" sz="900" dirty="0">
                 <a:solidFill>
-                  <a:srgbClr val="94A3B8"/>
+                  <a:srgbClr val="64748B"/>
                 </a:solidFill>
                 <a:latin typeface="Calibri" pitchFamily="34" charset="0"/>
                 <a:ea typeface="Calibri" pitchFamily="34" charset="-122"/>
@@ -2939,38 +2881,9 @@
           </a:p>
         </p:txBody>
       </p:sp>
-      <p:sp>
-        <p:nvSpPr>
-          <p:cNvPr id="8" name="Shape 5"/>
-          <p:cNvSpPr/>
-          <p:nvPr/>
-        </p:nvSpPr>
-        <p:spPr>
-          <a:xfrm>
-            <a:off x="7772400" y="4590288"/>
-            <a:ext cx="969264" cy="475488"/>
-          </a:xfrm>
-          <a:prstGeom prst="roundRect">
-            <a:avLst>
-              <a:gd name="adj" fmla="val 11538"/>
-            </a:avLst>
-          </a:prstGeom>
-          <a:solidFill>
-            <a:srgbClr val="FFFFFF"/>
-          </a:solidFill>
-          <a:ln/>
-          <a:effectLst>
-            <a:outerShdw sx="100000" sy="100000" kx="0" ky="0" algn="bl" rotWithShape="0" blurRad="101600" dist="38100" dir="5400000">
-              <a:srgbClr val="000000">
-                <a:alpha val="35000"/>
-              </a:srgbClr>
-            </a:outerShdw>
-          </a:effectLst>
-        </p:spPr>
-      </p:sp>
       <p:pic>
         <p:nvPicPr>
-          <p:cNvPr id="9" name="Image 1" descr="/Users/pop7/Library/CloudStorage/OneDrive-MonsterConnectCo.,Ltd/Lecture/KOSEN69 - software-security/slides/pptx/assets/logo-small.png">    </p:cNvPr>
+          <p:cNvPr id="8" name="Image 1" descr="/Users/pop7/Library/CloudStorage/OneDrive-MonsterConnectCo.,Ltd/Lecture/KOSEN69 - software-security/slides/pptx/assets/logo-small.png">    </p:cNvPr>
           <p:cNvPicPr>
             <a:picLocks noChangeAspect="1"/>
           </p:cNvPicPr>
@@ -2984,7 +2897,7 @@
         </p:blipFill>
         <p:spPr>
           <a:xfrm>
-            <a:off x="7872984" y="4681728"/>
+            <a:off x="7882128" y="4700016"/>
             <a:ext cx="768096" cy="356616"/>
           </a:xfrm>
           <a:prstGeom prst="rect">
@@ -3006,7 +2919,7 @@
     <p:bg>
       <p:bgPr>
         <a:solidFill>
-          <a:srgbClr val="0E1726"/>
+          <a:srgbClr val="FFFFFF"/>
         </a:solidFill>
       </p:bgPr>
     </p:bg>
@@ -3043,9 +2956,9 @@
           </a:solidFill>
           <a:ln/>
           <a:effectLst>
-            <a:outerShdw sx="100000" sy="100000" kx="0" ky="0" algn="bl" rotWithShape="0" blurRad="101600" dist="38100" dir="5400000">
+            <a:outerShdw sx="100000" sy="100000" kx="0" ky="0" algn="bl" rotWithShape="0" blurRad="76200" dist="25400" dir="5400000">
               <a:srgbClr val="000000">
-                <a:alpha val="35000"/>
+                <a:alpha val="12000"/>
               </a:srgbClr>
             </a:outerShdw>
           </a:effectLst>
@@ -3102,7 +3015,7 @@
             <a:r>
               <a:rPr lang="en-US" sz="2600" b="1" dirty="0">
                 <a:solidFill>
-                  <a:srgbClr val="E6EDF3"/>
+                  <a:srgbClr val="1F2937"/>
                 </a:solidFill>
                 <a:latin typeface="Arial" pitchFamily="34" charset="0"/>
                 <a:ea typeface="Arial" pitchFamily="34" charset="-122"/>
@@ -3131,13 +3044,13 @@
             </a:avLst>
           </a:prstGeom>
           <a:solidFill>
-            <a:srgbClr val="18243A"/>
+            <a:srgbClr val="F1F5F9"/>
           </a:solidFill>
           <a:ln/>
           <a:effectLst>
-            <a:outerShdw sx="100000" sy="100000" kx="0" ky="0" algn="bl" rotWithShape="0" blurRad="101600" dist="38100" dir="5400000">
+            <a:outerShdw sx="100000" sy="100000" kx="0" ky="0" algn="bl" rotWithShape="0" blurRad="76200" dist="25400" dir="5400000">
               <a:srgbClr val="000000">
-                <a:alpha val="35000"/>
+                <a:alpha val="12000"/>
               </a:srgbClr>
             </a:outerShdw>
           </a:effectLst>
@@ -3174,7 +3087,7 @@
             <a:r>
               <a:rPr lang="en-US" sz="1400" dirty="0">
                 <a:solidFill>
-                  <a:srgbClr val="E6EDF3"/>
+                  <a:srgbClr val="1F2937"/>
                 </a:solidFill>
                 <a:latin typeface="Calibri" pitchFamily="34" charset="0"/>
                 <a:ea typeface="Calibri" pitchFamily="34" charset="-122"/>
@@ -3195,7 +3108,7 @@
             <a:r>
               <a:rPr lang="en-US" sz="1400" dirty="0">
                 <a:solidFill>
-                  <a:srgbClr val="E6EDF3"/>
+                  <a:srgbClr val="1F2937"/>
                 </a:solidFill>
                 <a:latin typeface="Calibri" pitchFamily="34" charset="0"/>
                 <a:ea typeface="Calibri" pitchFamily="34" charset="-122"/>
@@ -3216,7 +3129,7 @@
             <a:r>
               <a:rPr lang="en-US" sz="1400" dirty="0">
                 <a:solidFill>
-                  <a:srgbClr val="E6EDF3"/>
+                  <a:srgbClr val="1F2937"/>
                 </a:solidFill>
                 <a:latin typeface="Calibri" pitchFamily="34" charset="0"/>
                 <a:ea typeface="Calibri" pitchFamily="34" charset="-122"/>
@@ -3255,7 +3168,7 @@
             <a:r>
               <a:rPr lang="en-US" sz="900" dirty="0">
                 <a:solidFill>
-                  <a:srgbClr val="94A3B8"/>
+                  <a:srgbClr val="64748B"/>
                 </a:solidFill>
                 <a:latin typeface="Calibri" pitchFamily="34" charset="0"/>
                 <a:ea typeface="Calibri" pitchFamily="34" charset="-122"/>
@@ -3267,38 +3180,9 @@
           </a:p>
         </p:txBody>
       </p:sp>
-      <p:sp>
-        <p:nvSpPr>
-          <p:cNvPr id="8" name="Shape 5"/>
-          <p:cNvSpPr/>
-          <p:nvPr/>
-        </p:nvSpPr>
-        <p:spPr>
-          <a:xfrm>
-            <a:off x="7772400" y="4590288"/>
-            <a:ext cx="969264" cy="475488"/>
-          </a:xfrm>
-          <a:prstGeom prst="roundRect">
-            <a:avLst>
-              <a:gd name="adj" fmla="val 11538"/>
-            </a:avLst>
-          </a:prstGeom>
-          <a:solidFill>
-            <a:srgbClr val="FFFFFF"/>
-          </a:solidFill>
-          <a:ln/>
-          <a:effectLst>
-            <a:outerShdw sx="100000" sy="100000" kx="0" ky="0" algn="bl" rotWithShape="0" blurRad="101600" dist="38100" dir="5400000">
-              <a:srgbClr val="000000">
-                <a:alpha val="35000"/>
-              </a:srgbClr>
-            </a:outerShdw>
-          </a:effectLst>
-        </p:spPr>
-      </p:sp>
       <p:pic>
         <p:nvPicPr>
-          <p:cNvPr id="9" name="Image 1" descr="/Users/pop7/Library/CloudStorage/OneDrive-MonsterConnectCo.,Ltd/Lecture/KOSEN69 - software-security/slides/pptx/assets/logo-small.png">    </p:cNvPr>
+          <p:cNvPr id="8" name="Image 1" descr="/Users/pop7/Library/CloudStorage/OneDrive-MonsterConnectCo.,Ltd/Lecture/KOSEN69 - software-security/slides/pptx/assets/logo-small.png">    </p:cNvPr>
           <p:cNvPicPr>
             <a:picLocks noChangeAspect="1"/>
           </p:cNvPicPr>
@@ -3312,7 +3196,7 @@
         </p:blipFill>
         <p:spPr>
           <a:xfrm>
-            <a:off x="7872984" y="4681728"/>
+            <a:off x="7882128" y="4700016"/>
             <a:ext cx="768096" cy="356616"/>
           </a:xfrm>
           <a:prstGeom prst="rect">
@@ -3334,7 +3218,7 @@
     <p:bg>
       <p:bgPr>
         <a:solidFill>
-          <a:srgbClr val="0E1726"/>
+          <a:srgbClr val="FFFFFF"/>
         </a:solidFill>
       </p:bgPr>
     </p:bg>
@@ -3371,9 +3255,9 @@
           </a:solidFill>
           <a:ln/>
           <a:effectLst>
-            <a:outerShdw sx="100000" sy="100000" kx="0" ky="0" algn="bl" rotWithShape="0" blurRad="101600" dist="38100" dir="5400000">
+            <a:outerShdw sx="100000" sy="100000" kx="0" ky="0" algn="bl" rotWithShape="0" blurRad="76200" dist="25400" dir="5400000">
               <a:srgbClr val="000000">
-                <a:alpha val="35000"/>
+                <a:alpha val="12000"/>
               </a:srgbClr>
             </a:outerShdw>
           </a:effectLst>
@@ -3430,7 +3314,7 @@
             <a:r>
               <a:rPr lang="en-US" sz="2600" b="1" dirty="0">
                 <a:solidFill>
-                  <a:srgbClr val="E6EDF3"/>
+                  <a:srgbClr val="1F2937"/>
                 </a:solidFill>
                 <a:latin typeface="Arial" pitchFamily="34" charset="0"/>
                 <a:ea typeface="Arial" pitchFamily="34" charset="-122"/>
@@ -3459,13 +3343,13 @@
             </a:avLst>
           </a:prstGeom>
           <a:solidFill>
-            <a:srgbClr val="18243A"/>
+            <a:srgbClr val="F1F5F9"/>
           </a:solidFill>
           <a:ln/>
           <a:effectLst>
-            <a:outerShdw sx="100000" sy="100000" kx="0" ky="0" algn="bl" rotWithShape="0" blurRad="101600" dist="38100" dir="5400000">
+            <a:outerShdw sx="100000" sy="100000" kx="0" ky="0" algn="bl" rotWithShape="0" blurRad="76200" dist="25400" dir="5400000">
               <a:srgbClr val="000000">
-                <a:alpha val="35000"/>
+                <a:alpha val="12000"/>
               </a:srgbClr>
             </a:outerShdw>
           </a:effectLst>
@@ -3502,7 +3386,7 @@
             <a:r>
               <a:rPr lang="en-US" sz="1400" dirty="0">
                 <a:solidFill>
-                  <a:srgbClr val="E6EDF3"/>
+                  <a:srgbClr val="1F2937"/>
                 </a:solidFill>
                 <a:latin typeface="Calibri" pitchFamily="34" charset="0"/>
                 <a:ea typeface="Calibri" pitchFamily="34" charset="-122"/>
@@ -3523,7 +3407,7 @@
             <a:r>
               <a:rPr lang="en-US" sz="1400" dirty="0">
                 <a:solidFill>
-                  <a:srgbClr val="E6EDF3"/>
+                  <a:srgbClr val="1F2937"/>
                 </a:solidFill>
                 <a:latin typeface="Calibri" pitchFamily="34" charset="0"/>
                 <a:ea typeface="Calibri" pitchFamily="34" charset="-122"/>
@@ -3544,7 +3428,7 @@
             <a:r>
               <a:rPr lang="en-US" sz="1400" dirty="0">
                 <a:solidFill>
-                  <a:srgbClr val="E6EDF3"/>
+                  <a:srgbClr val="1F2937"/>
                 </a:solidFill>
                 <a:latin typeface="Calibri" pitchFamily="34" charset="0"/>
                 <a:ea typeface="Calibri" pitchFamily="34" charset="-122"/>
@@ -3583,7 +3467,7 @@
             <a:r>
               <a:rPr lang="en-US" sz="900" dirty="0">
                 <a:solidFill>
-                  <a:srgbClr val="94A3B8"/>
+                  <a:srgbClr val="64748B"/>
                 </a:solidFill>
                 <a:latin typeface="Calibri" pitchFamily="34" charset="0"/>
                 <a:ea typeface="Calibri" pitchFamily="34" charset="-122"/>
@@ -3595,38 +3479,9 @@
           </a:p>
         </p:txBody>
       </p:sp>
-      <p:sp>
-        <p:nvSpPr>
-          <p:cNvPr id="8" name="Shape 5"/>
-          <p:cNvSpPr/>
-          <p:nvPr/>
-        </p:nvSpPr>
-        <p:spPr>
-          <a:xfrm>
-            <a:off x="7772400" y="4590288"/>
-            <a:ext cx="969264" cy="475488"/>
-          </a:xfrm>
-          <a:prstGeom prst="roundRect">
-            <a:avLst>
-              <a:gd name="adj" fmla="val 11538"/>
-            </a:avLst>
-          </a:prstGeom>
-          <a:solidFill>
-            <a:srgbClr val="FFFFFF"/>
-          </a:solidFill>
-          <a:ln/>
-          <a:effectLst>
-            <a:outerShdw sx="100000" sy="100000" kx="0" ky="0" algn="bl" rotWithShape="0" blurRad="101600" dist="38100" dir="5400000">
-              <a:srgbClr val="000000">
-                <a:alpha val="35000"/>
-              </a:srgbClr>
-            </a:outerShdw>
-          </a:effectLst>
-        </p:spPr>
-      </p:sp>
       <p:pic>
         <p:nvPicPr>
-          <p:cNvPr id="9" name="Image 1" descr="/Users/pop7/Library/CloudStorage/OneDrive-MonsterConnectCo.,Ltd/Lecture/KOSEN69 - software-security/slides/pptx/assets/logo-small.png">    </p:cNvPr>
+          <p:cNvPr id="8" name="Image 1" descr="/Users/pop7/Library/CloudStorage/OneDrive-MonsterConnectCo.,Ltd/Lecture/KOSEN69 - software-security/slides/pptx/assets/logo-small.png">    </p:cNvPr>
           <p:cNvPicPr>
             <a:picLocks noChangeAspect="1"/>
           </p:cNvPicPr>
@@ -3640,7 +3495,7 @@
         </p:blipFill>
         <p:spPr>
           <a:xfrm>
-            <a:off x="7872984" y="4681728"/>
+            <a:off x="7882128" y="4700016"/>
             <a:ext cx="768096" cy="356616"/>
           </a:xfrm>
           <a:prstGeom prst="rect">
@@ -3662,7 +3517,7 @@
     <p:bg>
       <p:bgPr>
         <a:solidFill>
-          <a:srgbClr val="0E1726"/>
+          <a:srgbClr val="FFFFFF"/>
         </a:solidFill>
       </p:bgPr>
     </p:bg>
@@ -3699,9 +3554,9 @@
           </a:solidFill>
           <a:ln/>
           <a:effectLst>
-            <a:outerShdw sx="100000" sy="100000" kx="0" ky="0" algn="bl" rotWithShape="0" blurRad="101600" dist="38100" dir="5400000">
+            <a:outerShdw sx="100000" sy="100000" kx="0" ky="0" algn="bl" rotWithShape="0" blurRad="76200" dist="25400" dir="5400000">
               <a:srgbClr val="000000">
-                <a:alpha val="35000"/>
+                <a:alpha val="12000"/>
               </a:srgbClr>
             </a:outerShdw>
           </a:effectLst>
@@ -3758,7 +3613,7 @@
             <a:r>
               <a:rPr lang="en-US" sz="2600" b="1" dirty="0">
                 <a:solidFill>
-                  <a:srgbClr val="E6EDF3"/>
+                  <a:srgbClr val="1F2937"/>
                 </a:solidFill>
                 <a:latin typeface="Arial" pitchFamily="34" charset="0"/>
                 <a:ea typeface="Arial" pitchFamily="34" charset="-122"/>
@@ -3787,13 +3642,13 @@
             </a:avLst>
           </a:prstGeom>
           <a:solidFill>
-            <a:srgbClr val="18243A"/>
+            <a:srgbClr val="F1F5F9"/>
           </a:solidFill>
           <a:ln/>
           <a:effectLst>
-            <a:outerShdw sx="100000" sy="100000" kx="0" ky="0" algn="bl" rotWithShape="0" blurRad="101600" dist="38100" dir="5400000">
+            <a:outerShdw sx="100000" sy="100000" kx="0" ky="0" algn="bl" rotWithShape="0" blurRad="76200" dist="25400" dir="5400000">
               <a:srgbClr val="000000">
-                <a:alpha val="35000"/>
+                <a:alpha val="12000"/>
               </a:srgbClr>
             </a:outerShdw>
           </a:effectLst>
@@ -3830,7 +3685,7 @@
             <a:r>
               <a:rPr lang="en-US" sz="1400" dirty="0">
                 <a:solidFill>
-                  <a:srgbClr val="E6EDF3"/>
+                  <a:srgbClr val="1F2937"/>
                 </a:solidFill>
                 <a:latin typeface="Calibri" pitchFamily="34" charset="0"/>
                 <a:ea typeface="Calibri" pitchFamily="34" charset="-122"/>
@@ -3851,7 +3706,7 @@
             <a:r>
               <a:rPr lang="en-US" sz="1400" dirty="0">
                 <a:solidFill>
-                  <a:srgbClr val="E6EDF3"/>
+                  <a:srgbClr val="1F2937"/>
                 </a:solidFill>
                 <a:latin typeface="Calibri" pitchFamily="34" charset="0"/>
                 <a:ea typeface="Calibri" pitchFamily="34" charset="-122"/>
@@ -3872,7 +3727,7 @@
             <a:r>
               <a:rPr lang="en-US" sz="1400" dirty="0">
                 <a:solidFill>
-                  <a:srgbClr val="E6EDF3"/>
+                  <a:srgbClr val="1F2937"/>
                 </a:solidFill>
                 <a:latin typeface="Calibri" pitchFamily="34" charset="0"/>
                 <a:ea typeface="Calibri" pitchFamily="34" charset="-122"/>
@@ -3911,7 +3766,7 @@
             <a:r>
               <a:rPr lang="en-US" sz="900" dirty="0">
                 <a:solidFill>
-                  <a:srgbClr val="94A3B8"/>
+                  <a:srgbClr val="64748B"/>
                 </a:solidFill>
                 <a:latin typeface="Calibri" pitchFamily="34" charset="0"/>
                 <a:ea typeface="Calibri" pitchFamily="34" charset="-122"/>
@@ -3923,38 +3778,9 @@
           </a:p>
         </p:txBody>
       </p:sp>
-      <p:sp>
-        <p:nvSpPr>
-          <p:cNvPr id="8" name="Shape 5"/>
-          <p:cNvSpPr/>
-          <p:nvPr/>
-        </p:nvSpPr>
-        <p:spPr>
-          <a:xfrm>
-            <a:off x="7772400" y="4590288"/>
-            <a:ext cx="969264" cy="475488"/>
-          </a:xfrm>
-          <a:prstGeom prst="roundRect">
-            <a:avLst>
-              <a:gd name="adj" fmla="val 11538"/>
-            </a:avLst>
-          </a:prstGeom>
-          <a:solidFill>
-            <a:srgbClr val="FFFFFF"/>
-          </a:solidFill>
-          <a:ln/>
-          <a:effectLst>
-            <a:outerShdw sx="100000" sy="100000" kx="0" ky="0" algn="bl" rotWithShape="0" blurRad="101600" dist="38100" dir="5400000">
-              <a:srgbClr val="000000">
-                <a:alpha val="35000"/>
-              </a:srgbClr>
-            </a:outerShdw>
-          </a:effectLst>
-        </p:spPr>
-      </p:sp>
       <p:pic>
         <p:nvPicPr>
-          <p:cNvPr id="9" name="Image 1" descr="/Users/pop7/Library/CloudStorage/OneDrive-MonsterConnectCo.,Ltd/Lecture/KOSEN69 - software-security/slides/pptx/assets/logo-small.png">    </p:cNvPr>
+          <p:cNvPr id="8" name="Image 1" descr="/Users/pop7/Library/CloudStorage/OneDrive-MonsterConnectCo.,Ltd/Lecture/KOSEN69 - software-security/slides/pptx/assets/logo-small.png">    </p:cNvPr>
           <p:cNvPicPr>
             <a:picLocks noChangeAspect="1"/>
           </p:cNvPicPr>
@@ -3968,7 +3794,7 @@
         </p:blipFill>
         <p:spPr>
           <a:xfrm>
-            <a:off x="7872984" y="4681728"/>
+            <a:off x="7882128" y="4700016"/>
             <a:ext cx="768096" cy="356616"/>
           </a:xfrm>
           <a:prstGeom prst="rect">
@@ -3990,7 +3816,7 @@
     <p:bg>
       <p:bgPr>
         <a:solidFill>
-          <a:srgbClr val="0E1726"/>
+          <a:srgbClr val="FFFFFF"/>
         </a:solidFill>
       </p:bgPr>
     </p:bg>
@@ -4035,7 +3861,7 @@
             <a:r>
               <a:rPr lang="en-US" sz="4600" b="1" dirty="0">
                 <a:solidFill>
-                  <a:srgbClr val="E6EDF3"/>
+                  <a:srgbClr val="1F2937"/>
                 </a:solidFill>
                 <a:latin typeface="Arial" pitchFamily="34" charset="0"/>
                 <a:ea typeface="Arial" pitchFamily="34" charset="-122"/>
@@ -4086,38 +3912,9 @@
           </a:p>
         </p:txBody>
       </p:sp>
-      <p:sp>
-        <p:nvSpPr>
-          <p:cNvPr id="4" name="Shape 2"/>
-          <p:cNvSpPr/>
-          <p:nvPr/>
-        </p:nvSpPr>
-        <p:spPr>
-          <a:xfrm>
-            <a:off x="7772400" y="4590288"/>
-            <a:ext cx="969264" cy="475488"/>
-          </a:xfrm>
-          <a:prstGeom prst="roundRect">
-            <a:avLst>
-              <a:gd name="adj" fmla="val 11538"/>
-            </a:avLst>
-          </a:prstGeom>
-          <a:solidFill>
-            <a:srgbClr val="FFFFFF"/>
-          </a:solidFill>
-          <a:ln/>
-          <a:effectLst>
-            <a:outerShdw sx="100000" sy="100000" kx="0" ky="0" algn="bl" rotWithShape="0" blurRad="101600" dist="38100" dir="5400000">
-              <a:srgbClr val="000000">
-                <a:alpha val="35000"/>
-              </a:srgbClr>
-            </a:outerShdw>
-          </a:effectLst>
-        </p:spPr>
-      </p:sp>
       <p:pic>
         <p:nvPicPr>
-          <p:cNvPr id="5" name="Image 0" descr="/Users/pop7/Library/CloudStorage/OneDrive-MonsterConnectCo.,Ltd/Lecture/KOSEN69 - software-security/slides/pptx/assets/logo-small.png">    </p:cNvPr>
+          <p:cNvPr id="4" name="Image 0" descr="/Users/pop7/Library/CloudStorage/OneDrive-MonsterConnectCo.,Ltd/Lecture/KOSEN69 - software-security/slides/pptx/assets/logo-small.png">    </p:cNvPr>
           <p:cNvPicPr>
             <a:picLocks noChangeAspect="1"/>
           </p:cNvPicPr>
@@ -4131,7 +3928,7 @@
         </p:blipFill>
         <p:spPr>
           <a:xfrm>
-            <a:off x="7872984" y="4681728"/>
+            <a:off x="7882128" y="4700016"/>
             <a:ext cx="768096" cy="356616"/>
           </a:xfrm>
           <a:prstGeom prst="rect">
@@ -4153,7 +3950,7 @@
     <p:bg>
       <p:bgPr>
         <a:solidFill>
-          <a:srgbClr val="0E1726"/>
+          <a:srgbClr val="FFFFFF"/>
         </a:solidFill>
       </p:bgPr>
     </p:bg>
@@ -4190,9 +3987,9 @@
           </a:solidFill>
           <a:ln/>
           <a:effectLst>
-            <a:outerShdw sx="100000" sy="100000" kx="0" ky="0" algn="bl" rotWithShape="0" blurRad="101600" dist="38100" dir="5400000">
+            <a:outerShdw sx="100000" sy="100000" kx="0" ky="0" algn="bl" rotWithShape="0" blurRad="76200" dist="25400" dir="5400000">
               <a:srgbClr val="000000">
-                <a:alpha val="35000"/>
+                <a:alpha val="12000"/>
               </a:srgbClr>
             </a:outerShdw>
           </a:effectLst>
@@ -4249,7 +4046,7 @@
             <a:r>
               <a:rPr lang="en-US" sz="2600" b="1" dirty="0">
                 <a:solidFill>
-                  <a:srgbClr val="E6EDF3"/>
+                  <a:srgbClr val="1F2937"/>
                 </a:solidFill>
                 <a:latin typeface="Arial" pitchFamily="34" charset="0"/>
                 <a:ea typeface="Arial" pitchFamily="34" charset="-122"/>
@@ -4278,13 +4075,13 @@
             </a:avLst>
           </a:prstGeom>
           <a:solidFill>
-            <a:srgbClr val="18243A"/>
+            <a:srgbClr val="F1F5F9"/>
           </a:solidFill>
           <a:ln/>
           <a:effectLst>
-            <a:outerShdw sx="100000" sy="100000" kx="0" ky="0" algn="bl" rotWithShape="0" blurRad="101600" dist="38100" dir="5400000">
+            <a:outerShdw sx="100000" sy="100000" kx="0" ky="0" algn="bl" rotWithShape="0" blurRad="76200" dist="25400" dir="5400000">
               <a:srgbClr val="000000">
-                <a:alpha val="35000"/>
+                <a:alpha val="12000"/>
               </a:srgbClr>
             </a:outerShdw>
           </a:effectLst>
@@ -4321,7 +4118,7 @@
             <a:r>
               <a:rPr lang="en-US" sz="1400" dirty="0">
                 <a:solidFill>
-                  <a:srgbClr val="E6EDF3"/>
+                  <a:srgbClr val="1F2937"/>
                 </a:solidFill>
                 <a:latin typeface="Calibri" pitchFamily="34" charset="0"/>
                 <a:ea typeface="Calibri" pitchFamily="34" charset="-122"/>
@@ -4342,7 +4139,7 @@
             <a:r>
               <a:rPr lang="en-US" sz="1400" dirty="0">
                 <a:solidFill>
-                  <a:srgbClr val="E6EDF3"/>
+                  <a:srgbClr val="1F2937"/>
                 </a:solidFill>
                 <a:latin typeface="Calibri" pitchFamily="34" charset="0"/>
                 <a:ea typeface="Calibri" pitchFamily="34" charset="-122"/>
@@ -4363,7 +4160,7 @@
             <a:r>
               <a:rPr lang="en-US" sz="1400" dirty="0">
                 <a:solidFill>
-                  <a:srgbClr val="E6EDF3"/>
+                  <a:srgbClr val="1F2937"/>
                 </a:solidFill>
                 <a:latin typeface="Calibri" pitchFamily="34" charset="0"/>
                 <a:ea typeface="Calibri" pitchFamily="34" charset="-122"/>
@@ -4384,7 +4181,7 @@
             <a:r>
               <a:rPr lang="en-US" sz="1400" dirty="0">
                 <a:solidFill>
-                  <a:srgbClr val="E6EDF3"/>
+                  <a:srgbClr val="1F2937"/>
                 </a:solidFill>
                 <a:latin typeface="Calibri" pitchFamily="34" charset="0"/>
                 <a:ea typeface="Calibri" pitchFamily="34" charset="-122"/>
@@ -4405,7 +4202,7 @@
             <a:r>
               <a:rPr lang="en-US" sz="1400" dirty="0">
                 <a:solidFill>
-                  <a:srgbClr val="E6EDF3"/>
+                  <a:srgbClr val="1F2937"/>
                 </a:solidFill>
                 <a:latin typeface="Calibri" pitchFamily="34" charset="0"/>
                 <a:ea typeface="Calibri" pitchFamily="34" charset="-122"/>
@@ -4444,7 +4241,7 @@
             <a:r>
               <a:rPr lang="en-US" sz="900" dirty="0">
                 <a:solidFill>
-                  <a:srgbClr val="94A3B8"/>
+                  <a:srgbClr val="64748B"/>
                 </a:solidFill>
                 <a:latin typeface="Calibri" pitchFamily="34" charset="0"/>
                 <a:ea typeface="Calibri" pitchFamily="34" charset="-122"/>
@@ -4456,38 +4253,9 @@
           </a:p>
         </p:txBody>
       </p:sp>
-      <p:sp>
-        <p:nvSpPr>
-          <p:cNvPr id="8" name="Shape 5"/>
-          <p:cNvSpPr/>
-          <p:nvPr/>
-        </p:nvSpPr>
-        <p:spPr>
-          <a:xfrm>
-            <a:off x="7772400" y="4590288"/>
-            <a:ext cx="969264" cy="475488"/>
-          </a:xfrm>
-          <a:prstGeom prst="roundRect">
-            <a:avLst>
-              <a:gd name="adj" fmla="val 11538"/>
-            </a:avLst>
-          </a:prstGeom>
-          <a:solidFill>
-            <a:srgbClr val="FFFFFF"/>
-          </a:solidFill>
-          <a:ln/>
-          <a:effectLst>
-            <a:outerShdw sx="100000" sy="100000" kx="0" ky="0" algn="bl" rotWithShape="0" blurRad="101600" dist="38100" dir="5400000">
-              <a:srgbClr val="000000">
-                <a:alpha val="35000"/>
-              </a:srgbClr>
-            </a:outerShdw>
-          </a:effectLst>
-        </p:spPr>
-      </p:sp>
       <p:pic>
         <p:nvPicPr>
-          <p:cNvPr id="9" name="Image 1" descr="/Users/pop7/Library/CloudStorage/OneDrive-MonsterConnectCo.,Ltd/Lecture/KOSEN69 - software-security/slides/pptx/assets/logo-small.png">    </p:cNvPr>
+          <p:cNvPr id="8" name="Image 1" descr="/Users/pop7/Library/CloudStorage/OneDrive-MonsterConnectCo.,Ltd/Lecture/KOSEN69 - software-security/slides/pptx/assets/logo-small.png">    </p:cNvPr>
           <p:cNvPicPr>
             <a:picLocks noChangeAspect="1"/>
           </p:cNvPicPr>
@@ -4501,7 +4269,7 @@
         </p:blipFill>
         <p:spPr>
           <a:xfrm>
-            <a:off x="7872984" y="4681728"/>
+            <a:off x="7882128" y="4700016"/>
             <a:ext cx="768096" cy="356616"/>
           </a:xfrm>
           <a:prstGeom prst="rect">
@@ -4523,7 +4291,7 @@
     <p:bg>
       <p:bgPr>
         <a:solidFill>
-          <a:srgbClr val="0E1726"/>
+          <a:srgbClr val="FFFFFF"/>
         </a:solidFill>
       </p:bgPr>
     </p:bg>
@@ -4560,9 +4328,9 @@
           </a:solidFill>
           <a:ln/>
           <a:effectLst>
-            <a:outerShdw sx="100000" sy="100000" kx="0" ky="0" algn="bl" rotWithShape="0" blurRad="101600" dist="38100" dir="5400000">
+            <a:outerShdw sx="100000" sy="100000" kx="0" ky="0" algn="bl" rotWithShape="0" blurRad="76200" dist="25400" dir="5400000">
               <a:srgbClr val="000000">
-                <a:alpha val="35000"/>
+                <a:alpha val="12000"/>
               </a:srgbClr>
             </a:outerShdw>
           </a:effectLst>
@@ -4619,7 +4387,7 @@
             <a:r>
               <a:rPr lang="en-US" sz="2600" b="1" dirty="0">
                 <a:solidFill>
-                  <a:srgbClr val="E6EDF3"/>
+                  <a:srgbClr val="1F2937"/>
                 </a:solidFill>
                 <a:latin typeface="Arial" pitchFamily="34" charset="0"/>
                 <a:ea typeface="Arial" pitchFamily="34" charset="-122"/>
@@ -4648,13 +4416,13 @@
             </a:avLst>
           </a:prstGeom>
           <a:solidFill>
-            <a:srgbClr val="18243A"/>
+            <a:srgbClr val="F1F5F9"/>
           </a:solidFill>
           <a:ln/>
           <a:effectLst>
-            <a:outerShdw sx="100000" sy="100000" kx="0" ky="0" algn="bl" rotWithShape="0" blurRad="101600" dist="38100" dir="5400000">
+            <a:outerShdw sx="100000" sy="100000" kx="0" ky="0" algn="bl" rotWithShape="0" blurRad="76200" dist="25400" dir="5400000">
               <a:srgbClr val="000000">
-                <a:alpha val="35000"/>
+                <a:alpha val="12000"/>
               </a:srgbClr>
             </a:outerShdw>
           </a:effectLst>
@@ -4691,7 +4459,7 @@
             <a:r>
               <a:rPr lang="en-US" sz="1400" dirty="0">
                 <a:solidFill>
-                  <a:srgbClr val="E6EDF3"/>
+                  <a:srgbClr val="1F2937"/>
                 </a:solidFill>
                 <a:latin typeface="Calibri" pitchFamily="34" charset="0"/>
                 <a:ea typeface="Calibri" pitchFamily="34" charset="-122"/>
@@ -4712,7 +4480,7 @@
             <a:r>
               <a:rPr lang="en-US" sz="1400" dirty="0">
                 <a:solidFill>
-                  <a:srgbClr val="E6EDF3"/>
+                  <a:srgbClr val="1F2937"/>
                 </a:solidFill>
                 <a:latin typeface="Calibri" pitchFamily="34" charset="0"/>
                 <a:ea typeface="Calibri" pitchFamily="34" charset="-122"/>
@@ -4751,7 +4519,7 @@
             <a:r>
               <a:rPr lang="en-US" sz="900" dirty="0">
                 <a:solidFill>
-                  <a:srgbClr val="94A3B8"/>
+                  <a:srgbClr val="64748B"/>
                 </a:solidFill>
                 <a:latin typeface="Calibri" pitchFamily="34" charset="0"/>
                 <a:ea typeface="Calibri" pitchFamily="34" charset="-122"/>
@@ -4763,38 +4531,9 @@
           </a:p>
         </p:txBody>
       </p:sp>
-      <p:sp>
-        <p:nvSpPr>
-          <p:cNvPr id="8" name="Shape 5"/>
-          <p:cNvSpPr/>
-          <p:nvPr/>
-        </p:nvSpPr>
-        <p:spPr>
-          <a:xfrm>
-            <a:off x="7772400" y="4590288"/>
-            <a:ext cx="969264" cy="475488"/>
-          </a:xfrm>
-          <a:prstGeom prst="roundRect">
-            <a:avLst>
-              <a:gd name="adj" fmla="val 11538"/>
-            </a:avLst>
-          </a:prstGeom>
-          <a:solidFill>
-            <a:srgbClr val="FFFFFF"/>
-          </a:solidFill>
-          <a:ln/>
-          <a:effectLst>
-            <a:outerShdw sx="100000" sy="100000" kx="0" ky="0" algn="bl" rotWithShape="0" blurRad="101600" dist="38100" dir="5400000">
-              <a:srgbClr val="000000">
-                <a:alpha val="35000"/>
-              </a:srgbClr>
-            </a:outerShdw>
-          </a:effectLst>
-        </p:spPr>
-      </p:sp>
       <p:pic>
         <p:nvPicPr>
-          <p:cNvPr id="9" name="Image 1" descr="/Users/pop7/Library/CloudStorage/OneDrive-MonsterConnectCo.,Ltd/Lecture/KOSEN69 - software-security/slides/pptx/assets/logo-small.png">    </p:cNvPr>
+          <p:cNvPr id="8" name="Image 1" descr="/Users/pop7/Library/CloudStorage/OneDrive-MonsterConnectCo.,Ltd/Lecture/KOSEN69 - software-security/slides/pptx/assets/logo-small.png">    </p:cNvPr>
           <p:cNvPicPr>
             <a:picLocks noChangeAspect="1"/>
           </p:cNvPicPr>
@@ -4808,7 +4547,7 @@
         </p:blipFill>
         <p:spPr>
           <a:xfrm>
-            <a:off x="7872984" y="4681728"/>
+            <a:off x="7882128" y="4700016"/>
             <a:ext cx="768096" cy="356616"/>
           </a:xfrm>
           <a:prstGeom prst="rect">
@@ -4830,7 +4569,7 @@
     <p:bg>
       <p:bgPr>
         <a:solidFill>
-          <a:srgbClr val="0E1726"/>
+          <a:srgbClr val="FFFFFF"/>
         </a:solidFill>
       </p:bgPr>
     </p:bg>
@@ -4867,9 +4606,9 @@
           </a:solidFill>
           <a:ln/>
           <a:effectLst>
-            <a:outerShdw sx="100000" sy="100000" kx="0" ky="0" algn="bl" rotWithShape="0" blurRad="101600" dist="38100" dir="5400000">
+            <a:outerShdw sx="100000" sy="100000" kx="0" ky="0" algn="bl" rotWithShape="0" blurRad="76200" dist="25400" dir="5400000">
               <a:srgbClr val="000000">
-                <a:alpha val="35000"/>
+                <a:alpha val="12000"/>
               </a:srgbClr>
             </a:outerShdw>
           </a:effectLst>
@@ -4926,7 +4665,7 @@
             <a:r>
               <a:rPr lang="en-US" sz="2600" b="1" dirty="0">
                 <a:solidFill>
-                  <a:srgbClr val="E6EDF3"/>
+                  <a:srgbClr val="1F2937"/>
                 </a:solidFill>
                 <a:latin typeface="Arial" pitchFamily="34" charset="0"/>
                 <a:ea typeface="Arial" pitchFamily="34" charset="-122"/>
@@ -4955,13 +4694,13 @@
             </a:avLst>
           </a:prstGeom>
           <a:solidFill>
-            <a:srgbClr val="18243A"/>
+            <a:srgbClr val="F1F5F9"/>
           </a:solidFill>
           <a:ln/>
           <a:effectLst>
-            <a:outerShdw sx="100000" sy="100000" kx="0" ky="0" algn="bl" rotWithShape="0" blurRad="101600" dist="38100" dir="5400000">
+            <a:outerShdw sx="100000" sy="100000" kx="0" ky="0" algn="bl" rotWithShape="0" blurRad="76200" dist="25400" dir="5400000">
               <a:srgbClr val="000000">
-                <a:alpha val="35000"/>
+                <a:alpha val="12000"/>
               </a:srgbClr>
             </a:outerShdw>
           </a:effectLst>
@@ -4998,7 +4737,7 @@
             <a:r>
               <a:rPr lang="en-US" sz="1400" dirty="0">
                 <a:solidFill>
-                  <a:srgbClr val="E6EDF3"/>
+                  <a:srgbClr val="1F2937"/>
                 </a:solidFill>
                 <a:latin typeface="Calibri" pitchFamily="34" charset="0"/>
                 <a:ea typeface="Calibri" pitchFamily="34" charset="-122"/>
@@ -5019,7 +4758,7 @@
             <a:r>
               <a:rPr lang="en-US" sz="1400" dirty="0">
                 <a:solidFill>
-                  <a:srgbClr val="E6EDF3"/>
+                  <a:srgbClr val="1F2937"/>
                 </a:solidFill>
                 <a:latin typeface="Calibri" pitchFamily="34" charset="0"/>
                 <a:ea typeface="Calibri" pitchFamily="34" charset="-122"/>
@@ -5040,7 +4779,7 @@
             <a:r>
               <a:rPr lang="en-US" sz="1400" dirty="0">
                 <a:solidFill>
-                  <a:srgbClr val="E6EDF3"/>
+                  <a:srgbClr val="1F2937"/>
                 </a:solidFill>
                 <a:latin typeface="Calibri" pitchFamily="34" charset="0"/>
                 <a:ea typeface="Calibri" pitchFamily="34" charset="-122"/>
@@ -5079,7 +4818,7 @@
             <a:r>
               <a:rPr lang="en-US" sz="900" dirty="0">
                 <a:solidFill>
-                  <a:srgbClr val="94A3B8"/>
+                  <a:srgbClr val="64748B"/>
                 </a:solidFill>
                 <a:latin typeface="Calibri" pitchFamily="34" charset="0"/>
                 <a:ea typeface="Calibri" pitchFamily="34" charset="-122"/>
@@ -5091,38 +4830,9 @@
           </a:p>
         </p:txBody>
       </p:sp>
-      <p:sp>
-        <p:nvSpPr>
-          <p:cNvPr id="8" name="Shape 5"/>
-          <p:cNvSpPr/>
-          <p:nvPr/>
-        </p:nvSpPr>
-        <p:spPr>
-          <a:xfrm>
-            <a:off x="7772400" y="4590288"/>
-            <a:ext cx="969264" cy="475488"/>
-          </a:xfrm>
-          <a:prstGeom prst="roundRect">
-            <a:avLst>
-              <a:gd name="adj" fmla="val 11538"/>
-            </a:avLst>
-          </a:prstGeom>
-          <a:solidFill>
-            <a:srgbClr val="FFFFFF"/>
-          </a:solidFill>
-          <a:ln/>
-          <a:effectLst>
-            <a:outerShdw sx="100000" sy="100000" kx="0" ky="0" algn="bl" rotWithShape="0" blurRad="101600" dist="38100" dir="5400000">
-              <a:srgbClr val="000000">
-                <a:alpha val="35000"/>
-              </a:srgbClr>
-            </a:outerShdw>
-          </a:effectLst>
-        </p:spPr>
-      </p:sp>
       <p:pic>
         <p:nvPicPr>
-          <p:cNvPr id="9" name="Image 1" descr="/Users/pop7/Library/CloudStorage/OneDrive-MonsterConnectCo.,Ltd/Lecture/KOSEN69 - software-security/slides/pptx/assets/logo-small.png">    </p:cNvPr>
+          <p:cNvPr id="8" name="Image 1" descr="/Users/pop7/Library/CloudStorage/OneDrive-MonsterConnectCo.,Ltd/Lecture/KOSEN69 - software-security/slides/pptx/assets/logo-small.png">    </p:cNvPr>
           <p:cNvPicPr>
             <a:picLocks noChangeAspect="1"/>
           </p:cNvPicPr>
@@ -5136,7 +4846,7 @@
         </p:blipFill>
         <p:spPr>
           <a:xfrm>
-            <a:off x="7872984" y="4681728"/>
+            <a:off x="7882128" y="4700016"/>
             <a:ext cx="768096" cy="356616"/>
           </a:xfrm>
           <a:prstGeom prst="rect">
@@ -5158,7 +4868,7 @@
     <p:bg>
       <p:bgPr>
         <a:solidFill>
-          <a:srgbClr val="0E1726"/>
+          <a:srgbClr val="FFFFFF"/>
         </a:solidFill>
       </p:bgPr>
     </p:bg>
@@ -5195,9 +4905,9 @@
           </a:solidFill>
           <a:ln/>
           <a:effectLst>
-            <a:outerShdw sx="100000" sy="100000" kx="0" ky="0" algn="bl" rotWithShape="0" blurRad="101600" dist="38100" dir="5400000">
+            <a:outerShdw sx="100000" sy="100000" kx="0" ky="0" algn="bl" rotWithShape="0" blurRad="76200" dist="25400" dir="5400000">
               <a:srgbClr val="000000">
-                <a:alpha val="35000"/>
+                <a:alpha val="12000"/>
               </a:srgbClr>
             </a:outerShdw>
           </a:effectLst>
@@ -5254,7 +4964,7 @@
             <a:r>
               <a:rPr lang="en-US" sz="2600" b="1" dirty="0">
                 <a:solidFill>
-                  <a:srgbClr val="E6EDF3"/>
+                  <a:srgbClr val="1F2937"/>
                 </a:solidFill>
                 <a:latin typeface="Arial" pitchFamily="34" charset="0"/>
                 <a:ea typeface="Arial" pitchFamily="34" charset="-122"/>
@@ -5283,13 +4993,13 @@
             </a:avLst>
           </a:prstGeom>
           <a:solidFill>
-            <a:srgbClr val="18243A"/>
+            <a:srgbClr val="F1F5F9"/>
           </a:solidFill>
           <a:ln/>
           <a:effectLst>
-            <a:outerShdw sx="100000" sy="100000" kx="0" ky="0" algn="bl" rotWithShape="0" blurRad="101600" dist="38100" dir="5400000">
+            <a:outerShdw sx="100000" sy="100000" kx="0" ky="0" algn="bl" rotWithShape="0" blurRad="76200" dist="25400" dir="5400000">
               <a:srgbClr val="000000">
-                <a:alpha val="35000"/>
+                <a:alpha val="12000"/>
               </a:srgbClr>
             </a:outerShdw>
           </a:effectLst>
@@ -5326,7 +5036,7 @@
             <a:r>
               <a:rPr lang="en-US" sz="1400" dirty="0">
                 <a:solidFill>
-                  <a:srgbClr val="E6EDF3"/>
+                  <a:srgbClr val="1F2937"/>
                 </a:solidFill>
                 <a:latin typeface="Calibri" pitchFamily="34" charset="0"/>
                 <a:ea typeface="Calibri" pitchFamily="34" charset="-122"/>
@@ -5347,7 +5057,7 @@
             <a:r>
               <a:rPr lang="en-US" sz="1400" dirty="0">
                 <a:solidFill>
-                  <a:srgbClr val="E6EDF3"/>
+                  <a:srgbClr val="1F2937"/>
                 </a:solidFill>
                 <a:latin typeface="Calibri" pitchFamily="34" charset="0"/>
                 <a:ea typeface="Calibri" pitchFamily="34" charset="-122"/>
@@ -5368,7 +5078,7 @@
             <a:r>
               <a:rPr lang="en-US" sz="1400" dirty="0">
                 <a:solidFill>
-                  <a:srgbClr val="E6EDF3"/>
+                  <a:srgbClr val="1F2937"/>
                 </a:solidFill>
                 <a:latin typeface="Calibri" pitchFamily="34" charset="0"/>
                 <a:ea typeface="Calibri" pitchFamily="34" charset="-122"/>
@@ -5407,7 +5117,7 @@
             <a:r>
               <a:rPr lang="en-US" sz="900" dirty="0">
                 <a:solidFill>
-                  <a:srgbClr val="94A3B8"/>
+                  <a:srgbClr val="64748B"/>
                 </a:solidFill>
                 <a:latin typeface="Calibri" pitchFamily="34" charset="0"/>
                 <a:ea typeface="Calibri" pitchFamily="34" charset="-122"/>
@@ -5419,38 +5129,9 @@
           </a:p>
         </p:txBody>
       </p:sp>
-      <p:sp>
-        <p:nvSpPr>
-          <p:cNvPr id="8" name="Shape 5"/>
-          <p:cNvSpPr/>
-          <p:nvPr/>
-        </p:nvSpPr>
-        <p:spPr>
-          <a:xfrm>
-            <a:off x="7772400" y="4590288"/>
-            <a:ext cx="969264" cy="475488"/>
-          </a:xfrm>
-          <a:prstGeom prst="roundRect">
-            <a:avLst>
-              <a:gd name="adj" fmla="val 11538"/>
-            </a:avLst>
-          </a:prstGeom>
-          <a:solidFill>
-            <a:srgbClr val="FFFFFF"/>
-          </a:solidFill>
-          <a:ln/>
-          <a:effectLst>
-            <a:outerShdw sx="100000" sy="100000" kx="0" ky="0" algn="bl" rotWithShape="0" blurRad="101600" dist="38100" dir="5400000">
-              <a:srgbClr val="000000">
-                <a:alpha val="35000"/>
-              </a:srgbClr>
-            </a:outerShdw>
-          </a:effectLst>
-        </p:spPr>
-      </p:sp>
       <p:pic>
         <p:nvPicPr>
-          <p:cNvPr id="9" name="Image 1" descr="/Users/pop7/Library/CloudStorage/OneDrive-MonsterConnectCo.,Ltd/Lecture/KOSEN69 - software-security/slides/pptx/assets/logo-small.png">    </p:cNvPr>
+          <p:cNvPr id="8" name="Image 1" descr="/Users/pop7/Library/CloudStorage/OneDrive-MonsterConnectCo.,Ltd/Lecture/KOSEN69 - software-security/slides/pptx/assets/logo-small.png">    </p:cNvPr>
           <p:cNvPicPr>
             <a:picLocks noChangeAspect="1"/>
           </p:cNvPicPr>
@@ -5464,7 +5145,7 @@
         </p:blipFill>
         <p:spPr>
           <a:xfrm>
-            <a:off x="7872984" y="4681728"/>
+            <a:off x="7882128" y="4700016"/>
             <a:ext cx="768096" cy="356616"/>
           </a:xfrm>
           <a:prstGeom prst="rect">
@@ -5486,7 +5167,7 @@
     <p:bg>
       <p:bgPr>
         <a:solidFill>
-          <a:srgbClr val="0E1726"/>
+          <a:srgbClr val="FFFFFF"/>
         </a:solidFill>
       </p:bgPr>
     </p:bg>
@@ -5523,9 +5204,9 @@
           </a:solidFill>
           <a:ln/>
           <a:effectLst>
-            <a:outerShdw sx="100000" sy="100000" kx="0" ky="0" algn="bl" rotWithShape="0" blurRad="101600" dist="38100" dir="5400000">
+            <a:outerShdw sx="100000" sy="100000" kx="0" ky="0" algn="bl" rotWithShape="0" blurRad="76200" dist="25400" dir="5400000">
               <a:srgbClr val="000000">
-                <a:alpha val="35000"/>
+                <a:alpha val="12000"/>
               </a:srgbClr>
             </a:outerShdw>
           </a:effectLst>
@@ -5582,7 +5263,7 @@
             <a:r>
               <a:rPr lang="en-US" sz="2600" b="1" dirty="0">
                 <a:solidFill>
-                  <a:srgbClr val="E6EDF3"/>
+                  <a:srgbClr val="1F2937"/>
                 </a:solidFill>
                 <a:latin typeface="Arial" pitchFamily="34" charset="0"/>
                 <a:ea typeface="Arial" pitchFamily="34" charset="-122"/>
@@ -5611,13 +5292,13 @@
             </a:avLst>
           </a:prstGeom>
           <a:solidFill>
-            <a:srgbClr val="18243A"/>
+            <a:srgbClr val="F1F5F9"/>
           </a:solidFill>
           <a:ln/>
           <a:effectLst>
-            <a:outerShdw sx="100000" sy="100000" kx="0" ky="0" algn="bl" rotWithShape="0" blurRad="101600" dist="38100" dir="5400000">
+            <a:outerShdw sx="100000" sy="100000" kx="0" ky="0" algn="bl" rotWithShape="0" blurRad="76200" dist="25400" dir="5400000">
               <a:srgbClr val="000000">
-                <a:alpha val="35000"/>
+                <a:alpha val="12000"/>
               </a:srgbClr>
             </a:outerShdw>
           </a:effectLst>
@@ -5654,7 +5335,7 @@
             <a:r>
               <a:rPr lang="en-US" sz="1400" dirty="0">
                 <a:solidFill>
-                  <a:srgbClr val="E6EDF3"/>
+                  <a:srgbClr val="1F2937"/>
                 </a:solidFill>
                 <a:latin typeface="Calibri" pitchFamily="34" charset="0"/>
                 <a:ea typeface="Calibri" pitchFamily="34" charset="-122"/>
@@ -5675,7 +5356,7 @@
             <a:r>
               <a:rPr lang="en-US" sz="1400" dirty="0">
                 <a:solidFill>
-                  <a:srgbClr val="E6EDF3"/>
+                  <a:srgbClr val="1F2937"/>
                 </a:solidFill>
                 <a:latin typeface="Calibri" pitchFamily="34" charset="0"/>
                 <a:ea typeface="Calibri" pitchFamily="34" charset="-122"/>
@@ -5696,7 +5377,7 @@
             <a:r>
               <a:rPr lang="en-US" sz="1400" dirty="0">
                 <a:solidFill>
-                  <a:srgbClr val="E6EDF3"/>
+                  <a:srgbClr val="1F2937"/>
                 </a:solidFill>
                 <a:latin typeface="Calibri" pitchFamily="34" charset="0"/>
                 <a:ea typeface="Calibri" pitchFamily="34" charset="-122"/>
@@ -5729,7 +5410,7 @@
           </a:solidFill>
           <a:ln w="12700">
             <a:solidFill>
-              <a:srgbClr val="1E2B45"/>
+              <a:srgbClr val="E8EDF3"/>
             </a:solidFill>
             <a:prstDash val="solid"/>
           </a:ln>
@@ -5818,7 +5499,7 @@
             <a:r>
               <a:rPr lang="en-US" sz="900" dirty="0">
                 <a:solidFill>
-                  <a:srgbClr val="94A3B8"/>
+                  <a:srgbClr val="64748B"/>
                 </a:solidFill>
                 <a:latin typeface="Calibri" pitchFamily="34" charset="0"/>
                 <a:ea typeface="Calibri" pitchFamily="34" charset="-122"/>
@@ -5830,38 +5511,9 @@
           </a:p>
         </p:txBody>
       </p:sp>
-      <p:sp>
-        <p:nvSpPr>
-          <p:cNvPr id="10" name="Shape 7"/>
-          <p:cNvSpPr/>
-          <p:nvPr/>
-        </p:nvSpPr>
-        <p:spPr>
-          <a:xfrm>
-            <a:off x="7772400" y="4590288"/>
-            <a:ext cx="969264" cy="475488"/>
-          </a:xfrm>
-          <a:prstGeom prst="roundRect">
-            <a:avLst>
-              <a:gd name="adj" fmla="val 11538"/>
-            </a:avLst>
-          </a:prstGeom>
-          <a:solidFill>
-            <a:srgbClr val="FFFFFF"/>
-          </a:solidFill>
-          <a:ln/>
-          <a:effectLst>
-            <a:outerShdw sx="100000" sy="100000" kx="0" ky="0" algn="bl" rotWithShape="0" blurRad="101600" dist="38100" dir="5400000">
-              <a:srgbClr val="000000">
-                <a:alpha val="35000"/>
-              </a:srgbClr>
-            </a:outerShdw>
-          </a:effectLst>
-        </p:spPr>
-      </p:sp>
       <p:pic>
         <p:nvPicPr>
-          <p:cNvPr id="11" name="Image 1" descr="/Users/pop7/Library/CloudStorage/OneDrive-MonsterConnectCo.,Ltd/Lecture/KOSEN69 - software-security/slides/pptx/assets/logo-small.png">    </p:cNvPr>
+          <p:cNvPr id="10" name="Image 1" descr="/Users/pop7/Library/CloudStorage/OneDrive-MonsterConnectCo.,Ltd/Lecture/KOSEN69 - software-security/slides/pptx/assets/logo-small.png">    </p:cNvPr>
           <p:cNvPicPr>
             <a:picLocks noChangeAspect="1"/>
           </p:cNvPicPr>
@@ -5875,7 +5527,7 @@
         </p:blipFill>
         <p:spPr>
           <a:xfrm>
-            <a:off x="7872984" y="4681728"/>
+            <a:off x="7882128" y="4700016"/>
             <a:ext cx="768096" cy="356616"/>
           </a:xfrm>
           <a:prstGeom prst="rect">
@@ -5897,7 +5549,7 @@
     <p:bg>
       <p:bgPr>
         <a:solidFill>
-          <a:srgbClr val="0E1726"/>
+          <a:srgbClr val="FFFFFF"/>
         </a:solidFill>
       </p:bgPr>
     </p:bg>
@@ -5934,9 +5586,9 @@
           </a:solidFill>
           <a:ln/>
           <a:effectLst>
-            <a:outerShdw sx="100000" sy="100000" kx="0" ky="0" algn="bl" rotWithShape="0" blurRad="101600" dist="38100" dir="5400000">
+            <a:outerShdw sx="100000" sy="100000" kx="0" ky="0" algn="bl" rotWithShape="0" blurRad="76200" dist="25400" dir="5400000">
               <a:srgbClr val="000000">
-                <a:alpha val="35000"/>
+                <a:alpha val="12000"/>
               </a:srgbClr>
             </a:outerShdw>
           </a:effectLst>
@@ -5993,7 +5645,7 @@
             <a:r>
               <a:rPr lang="en-US" sz="2600" b="1" dirty="0">
                 <a:solidFill>
-                  <a:srgbClr val="E6EDF3"/>
+                  <a:srgbClr val="1F2937"/>
                 </a:solidFill>
                 <a:latin typeface="Arial" pitchFamily="34" charset="0"/>
                 <a:ea typeface="Arial" pitchFamily="34" charset="-122"/>
@@ -6026,7 +5678,7 @@
           </a:solidFill>
           <a:ln w="12700">
             <a:solidFill>
-              <a:srgbClr val="1E2B45"/>
+              <a:srgbClr val="E8EDF3"/>
             </a:solidFill>
             <a:prstDash val="solid"/>
           </a:ln>
@@ -6105,13 +5757,13 @@
             </a:avLst>
           </a:prstGeom>
           <a:solidFill>
-            <a:srgbClr val="18243A"/>
+            <a:srgbClr val="F1F5F9"/>
           </a:solidFill>
           <a:ln/>
           <a:effectLst>
-            <a:outerShdw sx="100000" sy="100000" kx="0" ky="0" algn="bl" rotWithShape="0" blurRad="101600" dist="38100" dir="5400000">
+            <a:outerShdw sx="100000" sy="100000" kx="0" ky="0" algn="bl" rotWithShape="0" blurRad="76200" dist="25400" dir="5400000">
               <a:srgbClr val="000000">
-                <a:alpha val="35000"/>
+                <a:alpha val="12000"/>
               </a:srgbClr>
             </a:outerShdw>
           </a:effectLst>
@@ -6148,7 +5800,7 @@
             <a:r>
               <a:rPr lang="en-US" sz="1400" dirty="0">
                 <a:solidFill>
-                  <a:srgbClr val="E6EDF3"/>
+                  <a:srgbClr val="1F2937"/>
                 </a:solidFill>
                 <a:latin typeface="Calibri" pitchFamily="34" charset="0"/>
                 <a:ea typeface="Calibri" pitchFamily="34" charset="-122"/>
@@ -6169,7 +5821,7 @@
             <a:r>
               <a:rPr lang="en-US" sz="1400" dirty="0">
                 <a:solidFill>
-                  <a:srgbClr val="E6EDF3"/>
+                  <a:srgbClr val="1F2937"/>
                 </a:solidFill>
                 <a:latin typeface="Calibri" pitchFamily="34" charset="0"/>
                 <a:ea typeface="Calibri" pitchFamily="34" charset="-122"/>
@@ -6190,7 +5842,7 @@
             <a:r>
               <a:rPr lang="en-US" sz="1400" dirty="0">
                 <a:solidFill>
-                  <a:srgbClr val="E6EDF3"/>
+                  <a:srgbClr val="1F2937"/>
                 </a:solidFill>
                 <a:latin typeface="Calibri" pitchFamily="34" charset="0"/>
                 <a:ea typeface="Calibri" pitchFamily="34" charset="-122"/>
@@ -6229,7 +5881,7 @@
             <a:r>
               <a:rPr lang="en-US" sz="900" dirty="0">
                 <a:solidFill>
-                  <a:srgbClr val="94A3B8"/>
+                  <a:srgbClr val="64748B"/>
                 </a:solidFill>
                 <a:latin typeface="Calibri" pitchFamily="34" charset="0"/>
                 <a:ea typeface="Calibri" pitchFamily="34" charset="-122"/>
@@ -6241,38 +5893,9 @@
           </a:p>
         </p:txBody>
       </p:sp>
-      <p:sp>
-        <p:nvSpPr>
-          <p:cNvPr id="10" name="Shape 7"/>
-          <p:cNvSpPr/>
-          <p:nvPr/>
-        </p:nvSpPr>
-        <p:spPr>
-          <a:xfrm>
-            <a:off x="7772400" y="4590288"/>
-            <a:ext cx="969264" cy="475488"/>
-          </a:xfrm>
-          <a:prstGeom prst="roundRect">
-            <a:avLst>
-              <a:gd name="adj" fmla="val 11538"/>
-            </a:avLst>
-          </a:prstGeom>
-          <a:solidFill>
-            <a:srgbClr val="FFFFFF"/>
-          </a:solidFill>
-          <a:ln/>
-          <a:effectLst>
-            <a:outerShdw sx="100000" sy="100000" kx="0" ky="0" algn="bl" rotWithShape="0" blurRad="101600" dist="38100" dir="5400000">
-              <a:srgbClr val="000000">
-                <a:alpha val="35000"/>
-              </a:srgbClr>
-            </a:outerShdw>
-          </a:effectLst>
-        </p:spPr>
-      </p:sp>
       <p:pic>
         <p:nvPicPr>
-          <p:cNvPr id="11" name="Image 1" descr="/Users/pop7/Library/CloudStorage/OneDrive-MonsterConnectCo.,Ltd/Lecture/KOSEN69 - software-security/slides/pptx/assets/logo-small.png">    </p:cNvPr>
+          <p:cNvPr id="10" name="Image 1" descr="/Users/pop7/Library/CloudStorage/OneDrive-MonsterConnectCo.,Ltd/Lecture/KOSEN69 - software-security/slides/pptx/assets/logo-small.png">    </p:cNvPr>
           <p:cNvPicPr>
             <a:picLocks noChangeAspect="1"/>
           </p:cNvPicPr>
@@ -6286,7 +5909,7 @@
         </p:blipFill>
         <p:spPr>
           <a:xfrm>
-            <a:off x="7872984" y="4681728"/>
+            <a:off x="7882128" y="4700016"/>
             <a:ext cx="768096" cy="356616"/>
           </a:xfrm>
           <a:prstGeom prst="rect">
@@ -6308,7 +5931,7 @@
     <p:bg>
       <p:bgPr>
         <a:solidFill>
-          <a:srgbClr val="0E1726"/>
+          <a:srgbClr val="FFFFFF"/>
         </a:solidFill>
       </p:bgPr>
     </p:bg>
@@ -6345,9 +5968,9 @@
           </a:solidFill>
           <a:ln/>
           <a:effectLst>
-            <a:outerShdw sx="100000" sy="100000" kx="0" ky="0" algn="bl" rotWithShape="0" blurRad="101600" dist="38100" dir="5400000">
+            <a:outerShdw sx="100000" sy="100000" kx="0" ky="0" algn="bl" rotWithShape="0" blurRad="76200" dist="25400" dir="5400000">
               <a:srgbClr val="000000">
-                <a:alpha val="35000"/>
+                <a:alpha val="12000"/>
               </a:srgbClr>
             </a:outerShdw>
           </a:effectLst>
@@ -6404,7 +6027,7 @@
             <a:r>
               <a:rPr lang="en-US" sz="2600" b="1" dirty="0">
                 <a:solidFill>
-                  <a:srgbClr val="E6EDF3"/>
+                  <a:srgbClr val="1F2937"/>
                 </a:solidFill>
                 <a:latin typeface="Arial" pitchFamily="34" charset="0"/>
                 <a:ea typeface="Arial" pitchFamily="34" charset="-122"/>
@@ -6437,7 +6060,7 @@
           </a:solidFill>
           <a:ln w="12700">
             <a:solidFill>
-              <a:srgbClr val="1E2B45"/>
+              <a:srgbClr val="E8EDF3"/>
             </a:solidFill>
             <a:prstDash val="solid"/>
           </a:ln>
@@ -6516,13 +6139,13 @@
             </a:avLst>
           </a:prstGeom>
           <a:solidFill>
-            <a:srgbClr val="18243A"/>
+            <a:srgbClr val="F1F5F9"/>
           </a:solidFill>
           <a:ln/>
           <a:effectLst>
-            <a:outerShdw sx="100000" sy="100000" kx="0" ky="0" algn="bl" rotWithShape="0" blurRad="101600" dist="38100" dir="5400000">
+            <a:outerShdw sx="100000" sy="100000" kx="0" ky="0" algn="bl" rotWithShape="0" blurRad="76200" dist="25400" dir="5400000">
               <a:srgbClr val="000000">
-                <a:alpha val="35000"/>
+                <a:alpha val="12000"/>
               </a:srgbClr>
             </a:outerShdw>
           </a:effectLst>
@@ -6559,7 +6182,7 @@
             <a:r>
               <a:rPr lang="en-US" sz="1400" dirty="0">
                 <a:solidFill>
-                  <a:srgbClr val="E6EDF3"/>
+                  <a:srgbClr val="1F2937"/>
                 </a:solidFill>
                 <a:latin typeface="Calibri" pitchFamily="34" charset="0"/>
                 <a:ea typeface="Calibri" pitchFamily="34" charset="-122"/>
@@ -6580,7 +6203,7 @@
             <a:r>
               <a:rPr lang="en-US" sz="1400" dirty="0">
                 <a:solidFill>
-                  <a:srgbClr val="E6EDF3"/>
+                  <a:srgbClr val="1F2937"/>
                 </a:solidFill>
                 <a:latin typeface="Calibri" pitchFamily="34" charset="0"/>
                 <a:ea typeface="Calibri" pitchFamily="34" charset="-122"/>
@@ -6619,7 +6242,7 @@
             <a:r>
               <a:rPr lang="en-US" sz="900" dirty="0">
                 <a:solidFill>
-                  <a:srgbClr val="94A3B8"/>
+                  <a:srgbClr val="64748B"/>
                 </a:solidFill>
                 <a:latin typeface="Calibri" pitchFamily="34" charset="0"/>
                 <a:ea typeface="Calibri" pitchFamily="34" charset="-122"/>
@@ -6631,38 +6254,9 @@
           </a:p>
         </p:txBody>
       </p:sp>
-      <p:sp>
-        <p:nvSpPr>
-          <p:cNvPr id="10" name="Shape 7"/>
-          <p:cNvSpPr/>
-          <p:nvPr/>
-        </p:nvSpPr>
-        <p:spPr>
-          <a:xfrm>
-            <a:off x="7772400" y="4590288"/>
-            <a:ext cx="969264" cy="475488"/>
-          </a:xfrm>
-          <a:prstGeom prst="roundRect">
-            <a:avLst>
-              <a:gd name="adj" fmla="val 11538"/>
-            </a:avLst>
-          </a:prstGeom>
-          <a:solidFill>
-            <a:srgbClr val="FFFFFF"/>
-          </a:solidFill>
-          <a:ln/>
-          <a:effectLst>
-            <a:outerShdw sx="100000" sy="100000" kx="0" ky="0" algn="bl" rotWithShape="0" blurRad="101600" dist="38100" dir="5400000">
-              <a:srgbClr val="000000">
-                <a:alpha val="35000"/>
-              </a:srgbClr>
-            </a:outerShdw>
-          </a:effectLst>
-        </p:spPr>
-      </p:sp>
       <p:pic>
         <p:nvPicPr>
-          <p:cNvPr id="11" name="Image 1" descr="/Users/pop7/Library/CloudStorage/OneDrive-MonsterConnectCo.,Ltd/Lecture/KOSEN69 - software-security/slides/pptx/assets/logo-small.png">    </p:cNvPr>
+          <p:cNvPr id="10" name="Image 1" descr="/Users/pop7/Library/CloudStorage/OneDrive-MonsterConnectCo.,Ltd/Lecture/KOSEN69 - software-security/slides/pptx/assets/logo-small.png">    </p:cNvPr>
           <p:cNvPicPr>
             <a:picLocks noChangeAspect="1"/>
           </p:cNvPicPr>
@@ -6676,7 +6270,7 @@
         </p:blipFill>
         <p:spPr>
           <a:xfrm>
-            <a:off x="7872984" y="4681728"/>
+            <a:off x="7882128" y="4700016"/>
             <a:ext cx="768096" cy="356616"/>
           </a:xfrm>
           <a:prstGeom prst="rect">
@@ -6698,7 +6292,7 @@
     <p:bg>
       <p:bgPr>
         <a:solidFill>
-          <a:srgbClr val="0E1726"/>
+          <a:srgbClr val="FFFFFF"/>
         </a:solidFill>
       </p:bgPr>
     </p:bg>
@@ -6735,9 +6329,9 @@
           </a:solidFill>
           <a:ln/>
           <a:effectLst>
-            <a:outerShdw sx="100000" sy="100000" kx="0" ky="0" algn="bl" rotWithShape="0" blurRad="101600" dist="38100" dir="5400000">
+            <a:outerShdw sx="100000" sy="100000" kx="0" ky="0" algn="bl" rotWithShape="0" blurRad="76200" dist="25400" dir="5400000">
               <a:srgbClr val="000000">
-                <a:alpha val="35000"/>
+                <a:alpha val="12000"/>
               </a:srgbClr>
             </a:outerShdw>
           </a:effectLst>
@@ -6794,7 +6388,7 @@
             <a:r>
               <a:rPr lang="en-US" sz="2600" b="1" dirty="0">
                 <a:solidFill>
-                  <a:srgbClr val="E6EDF3"/>
+                  <a:srgbClr val="1F2937"/>
                 </a:solidFill>
                 <a:latin typeface="Arial" pitchFamily="34" charset="0"/>
                 <a:ea typeface="Arial" pitchFamily="34" charset="-122"/>
@@ -6823,13 +6417,13 @@
             </a:avLst>
           </a:prstGeom>
           <a:solidFill>
-            <a:srgbClr val="18243A"/>
+            <a:srgbClr val="F1F5F9"/>
           </a:solidFill>
           <a:ln/>
           <a:effectLst>
-            <a:outerShdw sx="100000" sy="100000" kx="0" ky="0" algn="bl" rotWithShape="0" blurRad="101600" dist="38100" dir="5400000">
+            <a:outerShdw sx="100000" sy="100000" kx="0" ky="0" algn="bl" rotWithShape="0" blurRad="76200" dist="25400" dir="5400000">
               <a:srgbClr val="000000">
-                <a:alpha val="35000"/>
+                <a:alpha val="12000"/>
               </a:srgbClr>
             </a:outerShdw>
           </a:effectLst>
@@ -6866,7 +6460,7 @@
             <a:r>
               <a:rPr lang="en-US" sz="1400" dirty="0">
                 <a:solidFill>
-                  <a:srgbClr val="E6EDF3"/>
+                  <a:srgbClr val="1F2937"/>
                 </a:solidFill>
                 <a:latin typeface="Calibri" pitchFamily="34" charset="0"/>
                 <a:ea typeface="Calibri" pitchFamily="34" charset="-122"/>
@@ -6887,7 +6481,7 @@
             <a:r>
               <a:rPr lang="en-US" sz="1400" dirty="0">
                 <a:solidFill>
-                  <a:srgbClr val="E6EDF3"/>
+                  <a:srgbClr val="1F2937"/>
                 </a:solidFill>
                 <a:latin typeface="Calibri" pitchFamily="34" charset="0"/>
                 <a:ea typeface="Calibri" pitchFamily="34" charset="-122"/>
@@ -6908,7 +6502,7 @@
             <a:r>
               <a:rPr lang="en-US" sz="1400" dirty="0">
                 <a:solidFill>
-                  <a:srgbClr val="E6EDF3"/>
+                  <a:srgbClr val="1F2937"/>
                 </a:solidFill>
                 <a:latin typeface="Calibri" pitchFamily="34" charset="0"/>
                 <a:ea typeface="Calibri" pitchFamily="34" charset="-122"/>
@@ -6929,7 +6523,7 @@
             <a:r>
               <a:rPr lang="en-US" sz="1400" dirty="0">
                 <a:solidFill>
-                  <a:srgbClr val="E6EDF3"/>
+                  <a:srgbClr val="1F2937"/>
                 </a:solidFill>
                 <a:latin typeface="Calibri" pitchFamily="34" charset="0"/>
                 <a:ea typeface="Calibri" pitchFamily="34" charset="-122"/>
@@ -6968,7 +6562,7 @@
             <a:r>
               <a:rPr lang="en-US" sz="900" dirty="0">
                 <a:solidFill>
-                  <a:srgbClr val="94A3B8"/>
+                  <a:srgbClr val="64748B"/>
                 </a:solidFill>
                 <a:latin typeface="Calibri" pitchFamily="34" charset="0"/>
                 <a:ea typeface="Calibri" pitchFamily="34" charset="-122"/>
@@ -6980,38 +6574,9 @@
           </a:p>
         </p:txBody>
       </p:sp>
-      <p:sp>
-        <p:nvSpPr>
-          <p:cNvPr id="8" name="Shape 5"/>
-          <p:cNvSpPr/>
-          <p:nvPr/>
-        </p:nvSpPr>
-        <p:spPr>
-          <a:xfrm>
-            <a:off x="7772400" y="4590288"/>
-            <a:ext cx="969264" cy="475488"/>
-          </a:xfrm>
-          <a:prstGeom prst="roundRect">
-            <a:avLst>
-              <a:gd name="adj" fmla="val 11538"/>
-            </a:avLst>
-          </a:prstGeom>
-          <a:solidFill>
-            <a:srgbClr val="FFFFFF"/>
-          </a:solidFill>
-          <a:ln/>
-          <a:effectLst>
-            <a:outerShdw sx="100000" sy="100000" kx="0" ky="0" algn="bl" rotWithShape="0" blurRad="101600" dist="38100" dir="5400000">
-              <a:srgbClr val="000000">
-                <a:alpha val="35000"/>
-              </a:srgbClr>
-            </a:outerShdw>
-          </a:effectLst>
-        </p:spPr>
-      </p:sp>
       <p:pic>
         <p:nvPicPr>
-          <p:cNvPr id="9" name="Image 1" descr="/Users/pop7/Library/CloudStorage/OneDrive-MonsterConnectCo.,Ltd/Lecture/KOSEN69 - software-security/slides/pptx/assets/logo-small.png">    </p:cNvPr>
+          <p:cNvPr id="8" name="Image 1" descr="/Users/pop7/Library/CloudStorage/OneDrive-MonsterConnectCo.,Ltd/Lecture/KOSEN69 - software-security/slides/pptx/assets/logo-small.png">    </p:cNvPr>
           <p:cNvPicPr>
             <a:picLocks noChangeAspect="1"/>
           </p:cNvPicPr>
@@ -7025,7 +6590,7 @@
         </p:blipFill>
         <p:spPr>
           <a:xfrm>
-            <a:off x="7872984" y="4681728"/>
+            <a:off x="7882128" y="4700016"/>
             <a:ext cx="768096" cy="356616"/>
           </a:xfrm>
           <a:prstGeom prst="rect">

--- a/slides/pptx/week03.pptx
+++ b/slides/pptx/week03.pptx
@@ -3335,6 +3335,67 @@
         <p:spPr>
           <a:xfrm>
             <a:off x="457200" y="1325880"/>
+            <a:ext cx="8229600" cy="822960"/>
+          </a:xfrm>
+          <a:prstGeom prst="roundRect">
+            <a:avLst>
+              <a:gd name="adj" fmla="val 8889"/>
+            </a:avLst>
+          </a:prstGeom>
+          <a:solidFill>
+            <a:srgbClr val="E8EDF3"/>
+          </a:solidFill>
+          <a:ln/>
+        </p:spPr>
+      </p:sp>
+      <p:sp>
+        <p:nvSpPr>
+          <p:cNvPr id="6" name="Text 3"/>
+          <p:cNvSpPr/>
+          <p:nvPr/>
+        </p:nvSpPr>
+        <p:spPr>
+          <a:xfrm>
+            <a:off x="731520" y="1325880"/>
+            <a:ext cx="7680960" cy="822960"/>
+          </a:xfrm>
+          <a:prstGeom prst="rect">
+            <a:avLst/>
+          </a:prstGeom>
+          <a:noFill/>
+          <a:ln/>
+        </p:spPr>
+        <p:txBody>
+          <a:bodyPr wrap="square" lIns="0" tIns="0" rIns="0" bIns="0" rtlCol="0" anchor="ctr"/>
+          <a:lstStyle/>
+          <a:p>
+            <a:pPr indent="0" marL="0">
+              <a:buNone/>
+            </a:pPr>
+            <a:r>
+              <a:rPr lang="en-US" sz="1400" i="1" dirty="0">
+                <a:solidFill>
+                  <a:srgbClr val="E35205"/>
+                </a:solidFill>
+                <a:latin typeface="Calibri" pitchFamily="34" charset="0"/>
+                <a:ea typeface="Calibri" pitchFamily="34" charset="-122"/>
+                <a:cs typeface="Calibri" pitchFamily="34" charset="-120"/>
+              </a:rPr>
+              <a:t>📋 Worksheet 3 — labs/week03-cryptography/worksheet.md (Part 3) · kickoff: docker compose up (runs the crypto scripts)</a:t>
+            </a:r>
+            <a:endParaRPr lang="en-US" sz="1400" dirty="0"/>
+          </a:p>
+        </p:txBody>
+      </p:sp>
+      <p:sp>
+        <p:nvSpPr>
+          <p:cNvPr id="7" name="Shape 4"/>
+          <p:cNvSpPr/>
+          <p:nvPr/>
+        </p:nvSpPr>
+        <p:spPr>
+          <a:xfrm>
+            <a:off x="457200" y="2313432"/>
             <a:ext cx="8229600" cy="1207008"/>
           </a:xfrm>
           <a:prstGeom prst="roundRect">
@@ -3357,13 +3418,13 @@
       </p:sp>
       <p:sp>
         <p:nvSpPr>
-          <p:cNvPr id="6" name="Text 3"/>
-          <p:cNvSpPr/>
-          <p:nvPr/>
-        </p:nvSpPr>
-        <p:spPr>
-          <a:xfrm>
-            <a:off x="731520" y="1435608"/>
+          <p:cNvPr id="8" name="Text 5"/>
+          <p:cNvSpPr/>
+          <p:nvPr/>
+        </p:nvSpPr>
+        <p:spPr>
+          <a:xfrm>
+            <a:off x="731520" y="2423160"/>
             <a:ext cx="7680960" cy="987552"/>
           </a:xfrm>
           <a:prstGeom prst="rect">
@@ -3442,7 +3503,7 @@
       </p:sp>
       <p:sp>
         <p:nvSpPr>
-          <p:cNvPr id="7" name="Text 4"/>
+          <p:cNvPr id="9" name="Text 6"/>
           <p:cNvSpPr/>
           <p:nvPr/>
         </p:nvSpPr>
@@ -3481,7 +3542,7 @@
       </p:sp>
       <p:pic>
         <p:nvPicPr>
-          <p:cNvPr id="8" name="Image 1" descr="/Users/pop7/Library/CloudStorage/OneDrive-MonsterConnectCo.,Ltd/Lecture/KOSEN69 - software-security/slides/pptx/assets/logo-small.png">    </p:cNvPr>
+          <p:cNvPr id="10" name="Image 1" descr="/Users/pop7/Library/CloudStorage/OneDrive-MonsterConnectCo.,Ltd/Lecture/KOSEN69 - software-security/slides/pptx/assets/logo-small.png">    </p:cNvPr>
           <p:cNvPicPr>
             <a:picLocks noChangeAspect="1"/>
           </p:cNvPicPr>
